--- a/遇見你.pptx
+++ b/遇見你.pptx
@@ -5,19 +5,15 @@
     <p:sldMasterId id="2147483660" r:id="rId1"/>
   </p:sldMasterIdLst>
   <p:sldIdLst>
-    <p:sldId id="266" r:id="rId2"/>
-    <p:sldId id="270" r:id="rId3"/>
-    <p:sldId id="271" r:id="rId4"/>
-    <p:sldId id="272" r:id="rId5"/>
-    <p:sldId id="256" r:id="rId6"/>
-    <p:sldId id="257" r:id="rId7"/>
-    <p:sldId id="258" r:id="rId8"/>
-    <p:sldId id="259" r:id="rId9"/>
-    <p:sldId id="260" r:id="rId10"/>
-    <p:sldId id="261" r:id="rId11"/>
-    <p:sldId id="262" r:id="rId12"/>
-    <p:sldId id="263" r:id="rId13"/>
-    <p:sldId id="264" r:id="rId14"/>
+    <p:sldId id="256" r:id="rId2"/>
+    <p:sldId id="257" r:id="rId3"/>
+    <p:sldId id="258" r:id="rId4"/>
+    <p:sldId id="259" r:id="rId5"/>
+    <p:sldId id="260" r:id="rId6"/>
+    <p:sldId id="261" r:id="rId7"/>
+    <p:sldId id="262" r:id="rId8"/>
+    <p:sldId id="263" r:id="rId9"/>
+    <p:sldId id="264" r:id="rId10"/>
   </p:sldIdLst>
   <p:sldSz cx="12192000" cy="6858000"/>
   <p:notesSz cx="6858000" cy="9144000"/>
@@ -118,7 +114,7 @@
   </p:defaultTextStyle>
   <p:extLst>
     <p:ext uri="{EFAFB233-063F-42B5-8137-9DF3F51BA10A}">
-      <p15:sldGuideLst xmlns:p15="http://schemas.microsoft.com/office/powerpoint/2012/main" xmlns="">
+      <p15:sldGuideLst xmlns:p15="http://schemas.microsoft.com/office/powerpoint/2012/main">
         <p15:guide id="1" orient="horz" pos="2160" userDrawn="1">
           <p15:clr>
             <a:srgbClr val="A4A3A4"/>
@@ -173,10 +169,9 @@
           <a:lstStyle/>
           <a:p>
             <a:r>
-              <a:rPr lang="zh-TW" altLang="en-US" smtClean="0"/>
+              <a:rPr lang="zh-TW" altLang="en-US"/>
               <a:t>按一下以編輯母片標題樣式</a:t>
             </a:r>
-            <a:endParaRPr lang="zh-TW" altLang="en-US"/>
           </a:p>
         </p:txBody>
       </p:sp>
@@ -292,10 +287,9 @@
           </a:lstStyle>
           <a:p>
             <a:r>
-              <a:rPr lang="zh-TW" altLang="en-US" smtClean="0"/>
+              <a:rPr lang="zh-TW" altLang="en-US"/>
               <a:t>按一下以編輯母片副標題樣式</a:t>
             </a:r>
-            <a:endParaRPr lang="zh-TW" altLang="en-US"/>
           </a:p>
         </p:txBody>
       </p:sp>
@@ -317,7 +311,7 @@
             <a:fld id="{9C2E27BE-7C78-453E-8D49-6C3E6F394594}" type="datetimeFigureOut">
               <a:rPr lang="zh-TW" altLang="en-US" smtClean="0"/>
               <a:pPr/>
-              <a:t>2020/12/15</a:t>
+              <a:t>2025/2/13</a:t>
             </a:fld>
             <a:endParaRPr lang="zh-TW" altLang="en-US"/>
           </a:p>
@@ -407,10 +401,9 @@
           <a:lstStyle/>
           <a:p>
             <a:r>
-              <a:rPr lang="zh-TW" altLang="en-US" smtClean="0"/>
+              <a:rPr lang="zh-TW" altLang="en-US"/>
               <a:t>按一下以編輯母片標題樣式</a:t>
             </a:r>
-            <a:endParaRPr lang="zh-TW" altLang="en-US"/>
           </a:p>
         </p:txBody>
       </p:sp>
@@ -431,38 +424,37 @@
           <a:p>
             <a:pPr lvl="0"/>
             <a:r>
-              <a:rPr lang="zh-TW" altLang="en-US" smtClean="0"/>
+              <a:rPr lang="zh-TW" altLang="en-US"/>
               <a:t>按一下以編輯母片文字樣式</a:t>
             </a:r>
           </a:p>
           <a:p>
             <a:pPr lvl="1"/>
             <a:r>
-              <a:rPr lang="zh-TW" altLang="en-US" smtClean="0"/>
+              <a:rPr lang="zh-TW" altLang="en-US"/>
               <a:t>第二層</a:t>
             </a:r>
           </a:p>
           <a:p>
             <a:pPr lvl="2"/>
             <a:r>
-              <a:rPr lang="zh-TW" altLang="en-US" smtClean="0"/>
+              <a:rPr lang="zh-TW" altLang="en-US"/>
               <a:t>第三層</a:t>
             </a:r>
           </a:p>
           <a:p>
             <a:pPr lvl="3"/>
             <a:r>
-              <a:rPr lang="zh-TW" altLang="en-US" smtClean="0"/>
+              <a:rPr lang="zh-TW" altLang="en-US"/>
               <a:t>第四層</a:t>
             </a:r>
           </a:p>
           <a:p>
             <a:pPr lvl="4"/>
             <a:r>
-              <a:rPr lang="zh-TW" altLang="en-US" smtClean="0"/>
+              <a:rPr lang="zh-TW" altLang="en-US"/>
               <a:t>第五層</a:t>
             </a:r>
-            <a:endParaRPr lang="zh-TW" altLang="en-US"/>
           </a:p>
         </p:txBody>
       </p:sp>
@@ -484,7 +476,7 @@
             <a:fld id="{9C2E27BE-7C78-453E-8D49-6C3E6F394594}" type="datetimeFigureOut">
               <a:rPr lang="zh-TW" altLang="en-US" smtClean="0"/>
               <a:pPr/>
-              <a:t>2020/12/15</a:t>
+              <a:t>2025/2/13</a:t>
             </a:fld>
             <a:endParaRPr lang="zh-TW" altLang="en-US"/>
           </a:p>
@@ -579,10 +571,9 @@
           <a:lstStyle/>
           <a:p>
             <a:r>
-              <a:rPr lang="zh-TW" altLang="en-US" smtClean="0"/>
+              <a:rPr lang="zh-TW" altLang="en-US"/>
               <a:t>按一下以編輯母片標題樣式</a:t>
             </a:r>
-            <a:endParaRPr lang="zh-TW" altLang="en-US"/>
           </a:p>
         </p:txBody>
       </p:sp>
@@ -608,38 +599,37 @@
           <a:p>
             <a:pPr lvl="0"/>
             <a:r>
-              <a:rPr lang="zh-TW" altLang="en-US" smtClean="0"/>
+              <a:rPr lang="zh-TW" altLang="en-US"/>
               <a:t>按一下以編輯母片文字樣式</a:t>
             </a:r>
           </a:p>
           <a:p>
             <a:pPr lvl="1"/>
             <a:r>
-              <a:rPr lang="zh-TW" altLang="en-US" smtClean="0"/>
+              <a:rPr lang="zh-TW" altLang="en-US"/>
               <a:t>第二層</a:t>
             </a:r>
           </a:p>
           <a:p>
             <a:pPr lvl="2"/>
             <a:r>
-              <a:rPr lang="zh-TW" altLang="en-US" smtClean="0"/>
+              <a:rPr lang="zh-TW" altLang="en-US"/>
               <a:t>第三層</a:t>
             </a:r>
           </a:p>
           <a:p>
             <a:pPr lvl="3"/>
             <a:r>
-              <a:rPr lang="zh-TW" altLang="en-US" smtClean="0"/>
+              <a:rPr lang="zh-TW" altLang="en-US"/>
               <a:t>第四層</a:t>
             </a:r>
           </a:p>
           <a:p>
             <a:pPr lvl="4"/>
             <a:r>
-              <a:rPr lang="zh-TW" altLang="en-US" smtClean="0"/>
+              <a:rPr lang="zh-TW" altLang="en-US"/>
               <a:t>第五層</a:t>
             </a:r>
-            <a:endParaRPr lang="zh-TW" altLang="en-US"/>
           </a:p>
         </p:txBody>
       </p:sp>
@@ -661,7 +651,7 @@
             <a:fld id="{9C2E27BE-7C78-453E-8D49-6C3E6F394594}" type="datetimeFigureOut">
               <a:rPr lang="zh-TW" altLang="en-US" smtClean="0"/>
               <a:pPr/>
-              <a:t>2020/12/15</a:t>
+              <a:t>2025/2/13</a:t>
             </a:fld>
             <a:endParaRPr lang="zh-TW" altLang="en-US"/>
           </a:p>
@@ -751,10 +741,9 @@
           <a:lstStyle/>
           <a:p>
             <a:r>
-              <a:rPr lang="zh-TW" altLang="en-US" smtClean="0"/>
+              <a:rPr lang="zh-TW" altLang="en-US"/>
               <a:t>按一下以編輯母片標題樣式</a:t>
             </a:r>
-            <a:endParaRPr lang="zh-TW" altLang="en-US"/>
           </a:p>
         </p:txBody>
       </p:sp>
@@ -775,38 +764,37 @@
           <a:p>
             <a:pPr lvl="0"/>
             <a:r>
-              <a:rPr lang="zh-TW" altLang="en-US" smtClean="0"/>
+              <a:rPr lang="zh-TW" altLang="en-US"/>
               <a:t>按一下以編輯母片文字樣式</a:t>
             </a:r>
           </a:p>
           <a:p>
             <a:pPr lvl="1"/>
             <a:r>
-              <a:rPr lang="zh-TW" altLang="en-US" smtClean="0"/>
+              <a:rPr lang="zh-TW" altLang="en-US"/>
               <a:t>第二層</a:t>
             </a:r>
           </a:p>
           <a:p>
             <a:pPr lvl="2"/>
             <a:r>
-              <a:rPr lang="zh-TW" altLang="en-US" smtClean="0"/>
+              <a:rPr lang="zh-TW" altLang="en-US"/>
               <a:t>第三層</a:t>
             </a:r>
           </a:p>
           <a:p>
             <a:pPr lvl="3"/>
             <a:r>
-              <a:rPr lang="zh-TW" altLang="en-US" smtClean="0"/>
+              <a:rPr lang="zh-TW" altLang="en-US"/>
               <a:t>第四層</a:t>
             </a:r>
           </a:p>
           <a:p>
             <a:pPr lvl="4"/>
             <a:r>
-              <a:rPr lang="zh-TW" altLang="en-US" smtClean="0"/>
+              <a:rPr lang="zh-TW" altLang="en-US"/>
               <a:t>第五層</a:t>
             </a:r>
-            <a:endParaRPr lang="zh-TW" altLang="en-US"/>
           </a:p>
         </p:txBody>
       </p:sp>
@@ -828,7 +816,7 @@
             <a:fld id="{9C2E27BE-7C78-453E-8D49-6C3E6F394594}" type="datetimeFigureOut">
               <a:rPr lang="zh-TW" altLang="en-US" smtClean="0"/>
               <a:pPr/>
-              <a:t>2020/12/15</a:t>
+              <a:t>2025/2/13</a:t>
             </a:fld>
             <a:endParaRPr lang="zh-TW" altLang="en-US"/>
           </a:p>
@@ -927,10 +915,9 @@
           </a:lstStyle>
           <a:p>
             <a:r>
-              <a:rPr lang="zh-TW" altLang="en-US" smtClean="0"/>
+              <a:rPr lang="zh-TW" altLang="en-US"/>
               <a:t>按一下以編輯母片標題樣式</a:t>
             </a:r>
-            <a:endParaRPr lang="zh-TW" altLang="en-US"/>
           </a:p>
         </p:txBody>
       </p:sp>
@@ -1047,7 +1034,7 @@
           <a:p>
             <a:pPr lvl="0"/>
             <a:r>
-              <a:rPr lang="zh-TW" altLang="en-US" smtClean="0"/>
+              <a:rPr lang="zh-TW" altLang="en-US"/>
               <a:t>按一下以編輯母片文字樣式</a:t>
             </a:r>
           </a:p>
@@ -1071,7 +1058,7 @@
             <a:fld id="{9C2E27BE-7C78-453E-8D49-6C3E6F394594}" type="datetimeFigureOut">
               <a:rPr lang="zh-TW" altLang="en-US" smtClean="0"/>
               <a:pPr/>
-              <a:t>2020/12/15</a:t>
+              <a:t>2025/2/13</a:t>
             </a:fld>
             <a:endParaRPr lang="zh-TW" altLang="en-US"/>
           </a:p>
@@ -1161,10 +1148,9 @@
           <a:lstStyle/>
           <a:p>
             <a:r>
-              <a:rPr lang="zh-TW" altLang="en-US" smtClean="0"/>
+              <a:rPr lang="zh-TW" altLang="en-US"/>
               <a:t>按一下以編輯母片標題樣式</a:t>
             </a:r>
-            <a:endParaRPr lang="zh-TW" altLang="en-US"/>
           </a:p>
         </p:txBody>
       </p:sp>
@@ -1218,38 +1204,37 @@
           <a:p>
             <a:pPr lvl="0"/>
             <a:r>
-              <a:rPr lang="zh-TW" altLang="en-US" smtClean="0"/>
+              <a:rPr lang="zh-TW" altLang="en-US"/>
               <a:t>按一下以編輯母片文字樣式</a:t>
             </a:r>
           </a:p>
           <a:p>
             <a:pPr lvl="1"/>
             <a:r>
-              <a:rPr lang="zh-TW" altLang="en-US" smtClean="0"/>
+              <a:rPr lang="zh-TW" altLang="en-US"/>
               <a:t>第二層</a:t>
             </a:r>
           </a:p>
           <a:p>
             <a:pPr lvl="2"/>
             <a:r>
-              <a:rPr lang="zh-TW" altLang="en-US" smtClean="0"/>
+              <a:rPr lang="zh-TW" altLang="en-US"/>
               <a:t>第三層</a:t>
             </a:r>
           </a:p>
           <a:p>
             <a:pPr lvl="3"/>
             <a:r>
-              <a:rPr lang="zh-TW" altLang="en-US" smtClean="0"/>
+              <a:rPr lang="zh-TW" altLang="en-US"/>
               <a:t>第四層</a:t>
             </a:r>
           </a:p>
           <a:p>
             <a:pPr lvl="4"/>
             <a:r>
-              <a:rPr lang="zh-TW" altLang="en-US" smtClean="0"/>
+              <a:rPr lang="zh-TW" altLang="en-US"/>
               <a:t>第五層</a:t>
             </a:r>
-            <a:endParaRPr lang="zh-TW" altLang="en-US"/>
           </a:p>
         </p:txBody>
       </p:sp>
@@ -1303,38 +1288,37 @@
           <a:p>
             <a:pPr lvl="0"/>
             <a:r>
-              <a:rPr lang="zh-TW" altLang="en-US" smtClean="0"/>
+              <a:rPr lang="zh-TW" altLang="en-US"/>
               <a:t>按一下以編輯母片文字樣式</a:t>
             </a:r>
           </a:p>
           <a:p>
             <a:pPr lvl="1"/>
             <a:r>
-              <a:rPr lang="zh-TW" altLang="en-US" smtClean="0"/>
+              <a:rPr lang="zh-TW" altLang="en-US"/>
               <a:t>第二層</a:t>
             </a:r>
           </a:p>
           <a:p>
             <a:pPr lvl="2"/>
             <a:r>
-              <a:rPr lang="zh-TW" altLang="en-US" smtClean="0"/>
+              <a:rPr lang="zh-TW" altLang="en-US"/>
               <a:t>第三層</a:t>
             </a:r>
           </a:p>
           <a:p>
             <a:pPr lvl="3"/>
             <a:r>
-              <a:rPr lang="zh-TW" altLang="en-US" smtClean="0"/>
+              <a:rPr lang="zh-TW" altLang="en-US"/>
               <a:t>第四層</a:t>
             </a:r>
           </a:p>
           <a:p>
             <a:pPr lvl="4"/>
             <a:r>
-              <a:rPr lang="zh-TW" altLang="en-US" smtClean="0"/>
+              <a:rPr lang="zh-TW" altLang="en-US"/>
               <a:t>第五層</a:t>
             </a:r>
-            <a:endParaRPr lang="zh-TW" altLang="en-US"/>
           </a:p>
         </p:txBody>
       </p:sp>
@@ -1356,7 +1340,7 @@
             <a:fld id="{9C2E27BE-7C78-453E-8D49-6C3E6F394594}" type="datetimeFigureOut">
               <a:rPr lang="zh-TW" altLang="en-US" smtClean="0"/>
               <a:pPr/>
-              <a:t>2020/12/15</a:t>
+              <a:t>2025/2/13</a:t>
             </a:fld>
             <a:endParaRPr lang="zh-TW" altLang="en-US"/>
           </a:p>
@@ -1450,10 +1434,9 @@
           </a:lstStyle>
           <a:p>
             <a:r>
-              <a:rPr lang="zh-TW" altLang="en-US" smtClean="0"/>
+              <a:rPr lang="zh-TW" altLang="en-US"/>
               <a:t>按一下以編輯母片標題樣式</a:t>
             </a:r>
-            <a:endParaRPr lang="zh-TW" altLang="en-US"/>
           </a:p>
         </p:txBody>
       </p:sp>
@@ -1516,7 +1499,7 @@
           <a:p>
             <a:pPr lvl="0"/>
             <a:r>
-              <a:rPr lang="zh-TW" altLang="en-US" smtClean="0"/>
+              <a:rPr lang="zh-TW" altLang="en-US"/>
               <a:t>按一下以編輯母片文字樣式</a:t>
             </a:r>
           </a:p>
@@ -1572,38 +1555,37 @@
           <a:p>
             <a:pPr lvl="0"/>
             <a:r>
-              <a:rPr lang="zh-TW" altLang="en-US" smtClean="0"/>
+              <a:rPr lang="zh-TW" altLang="en-US"/>
               <a:t>按一下以編輯母片文字樣式</a:t>
             </a:r>
           </a:p>
           <a:p>
             <a:pPr lvl="1"/>
             <a:r>
-              <a:rPr lang="zh-TW" altLang="en-US" smtClean="0"/>
+              <a:rPr lang="zh-TW" altLang="en-US"/>
               <a:t>第二層</a:t>
             </a:r>
           </a:p>
           <a:p>
             <a:pPr lvl="2"/>
             <a:r>
-              <a:rPr lang="zh-TW" altLang="en-US" smtClean="0"/>
+              <a:rPr lang="zh-TW" altLang="en-US"/>
               <a:t>第三層</a:t>
             </a:r>
           </a:p>
           <a:p>
             <a:pPr lvl="3"/>
             <a:r>
-              <a:rPr lang="zh-TW" altLang="en-US" smtClean="0"/>
+              <a:rPr lang="zh-TW" altLang="en-US"/>
               <a:t>第四層</a:t>
             </a:r>
           </a:p>
           <a:p>
             <a:pPr lvl="4"/>
             <a:r>
-              <a:rPr lang="zh-TW" altLang="en-US" smtClean="0"/>
+              <a:rPr lang="zh-TW" altLang="en-US"/>
               <a:t>第五層</a:t>
             </a:r>
-            <a:endParaRPr lang="zh-TW" altLang="en-US"/>
           </a:p>
         </p:txBody>
       </p:sp>
@@ -1666,7 +1648,7 @@
           <a:p>
             <a:pPr lvl="0"/>
             <a:r>
-              <a:rPr lang="zh-TW" altLang="en-US" smtClean="0"/>
+              <a:rPr lang="zh-TW" altLang="en-US"/>
               <a:t>按一下以編輯母片文字樣式</a:t>
             </a:r>
           </a:p>
@@ -1722,38 +1704,37 @@
           <a:p>
             <a:pPr lvl="0"/>
             <a:r>
-              <a:rPr lang="zh-TW" altLang="en-US" smtClean="0"/>
+              <a:rPr lang="zh-TW" altLang="en-US"/>
               <a:t>按一下以編輯母片文字樣式</a:t>
             </a:r>
           </a:p>
           <a:p>
             <a:pPr lvl="1"/>
             <a:r>
-              <a:rPr lang="zh-TW" altLang="en-US" smtClean="0"/>
+              <a:rPr lang="zh-TW" altLang="en-US"/>
               <a:t>第二層</a:t>
             </a:r>
           </a:p>
           <a:p>
             <a:pPr lvl="2"/>
             <a:r>
-              <a:rPr lang="zh-TW" altLang="en-US" smtClean="0"/>
+              <a:rPr lang="zh-TW" altLang="en-US"/>
               <a:t>第三層</a:t>
             </a:r>
           </a:p>
           <a:p>
             <a:pPr lvl="3"/>
             <a:r>
-              <a:rPr lang="zh-TW" altLang="en-US" smtClean="0"/>
+              <a:rPr lang="zh-TW" altLang="en-US"/>
               <a:t>第四層</a:t>
             </a:r>
           </a:p>
           <a:p>
             <a:pPr lvl="4"/>
             <a:r>
-              <a:rPr lang="zh-TW" altLang="en-US" smtClean="0"/>
+              <a:rPr lang="zh-TW" altLang="en-US"/>
               <a:t>第五層</a:t>
             </a:r>
-            <a:endParaRPr lang="zh-TW" altLang="en-US"/>
           </a:p>
         </p:txBody>
       </p:sp>
@@ -1775,7 +1756,7 @@
             <a:fld id="{9C2E27BE-7C78-453E-8D49-6C3E6F394594}" type="datetimeFigureOut">
               <a:rPr lang="zh-TW" altLang="en-US" smtClean="0"/>
               <a:pPr/>
-              <a:t>2020/12/15</a:t>
+              <a:t>2025/2/13</a:t>
             </a:fld>
             <a:endParaRPr lang="zh-TW" altLang="en-US"/>
           </a:p>
@@ -1865,10 +1846,9 @@
           <a:lstStyle/>
           <a:p>
             <a:r>
-              <a:rPr lang="zh-TW" altLang="en-US" smtClean="0"/>
+              <a:rPr lang="zh-TW" altLang="en-US"/>
               <a:t>按一下以編輯母片標題樣式</a:t>
             </a:r>
-            <a:endParaRPr lang="zh-TW" altLang="en-US"/>
           </a:p>
         </p:txBody>
       </p:sp>
@@ -1890,7 +1870,7 @@
             <a:fld id="{9C2E27BE-7C78-453E-8D49-6C3E6F394594}" type="datetimeFigureOut">
               <a:rPr lang="zh-TW" altLang="en-US" smtClean="0"/>
               <a:pPr/>
-              <a:t>2020/12/15</a:t>
+              <a:t>2025/2/13</a:t>
             </a:fld>
             <a:endParaRPr lang="zh-TW" altLang="en-US"/>
           </a:p>
@@ -1982,7 +1962,7 @@
             <a:fld id="{9C2E27BE-7C78-453E-8D49-6C3E6F394594}" type="datetimeFigureOut">
               <a:rPr lang="zh-TW" altLang="en-US" smtClean="0"/>
               <a:pPr/>
-              <a:t>2020/12/15</a:t>
+              <a:t>2025/2/13</a:t>
             </a:fld>
             <a:endParaRPr lang="zh-TW" altLang="en-US"/>
           </a:p>
@@ -2081,10 +2061,9 @@
           </a:lstStyle>
           <a:p>
             <a:r>
-              <a:rPr lang="zh-TW" altLang="en-US" smtClean="0"/>
+              <a:rPr lang="zh-TW" altLang="en-US"/>
               <a:t>按一下以編輯母片標題樣式</a:t>
             </a:r>
-            <a:endParaRPr lang="zh-TW" altLang="en-US"/>
           </a:p>
         </p:txBody>
       </p:sp>
@@ -2138,38 +2117,37 @@
           <a:p>
             <a:pPr lvl="0"/>
             <a:r>
-              <a:rPr lang="zh-TW" altLang="en-US" smtClean="0"/>
+              <a:rPr lang="zh-TW" altLang="en-US"/>
               <a:t>按一下以編輯母片文字樣式</a:t>
             </a:r>
           </a:p>
           <a:p>
             <a:pPr lvl="1"/>
             <a:r>
-              <a:rPr lang="zh-TW" altLang="en-US" smtClean="0"/>
+              <a:rPr lang="zh-TW" altLang="en-US"/>
               <a:t>第二層</a:t>
             </a:r>
           </a:p>
           <a:p>
             <a:pPr lvl="2"/>
             <a:r>
-              <a:rPr lang="zh-TW" altLang="en-US" smtClean="0"/>
+              <a:rPr lang="zh-TW" altLang="en-US"/>
               <a:t>第三層</a:t>
             </a:r>
           </a:p>
           <a:p>
             <a:pPr lvl="3"/>
             <a:r>
-              <a:rPr lang="zh-TW" altLang="en-US" smtClean="0"/>
+              <a:rPr lang="zh-TW" altLang="en-US"/>
               <a:t>第四層</a:t>
             </a:r>
           </a:p>
           <a:p>
             <a:pPr lvl="4"/>
             <a:r>
-              <a:rPr lang="zh-TW" altLang="en-US" smtClean="0"/>
+              <a:rPr lang="zh-TW" altLang="en-US"/>
               <a:t>第五層</a:t>
             </a:r>
-            <a:endParaRPr lang="zh-TW" altLang="en-US"/>
           </a:p>
         </p:txBody>
       </p:sp>
@@ -2232,7 +2210,7 @@
           <a:p>
             <a:pPr lvl="0"/>
             <a:r>
-              <a:rPr lang="zh-TW" altLang="en-US" smtClean="0"/>
+              <a:rPr lang="zh-TW" altLang="en-US"/>
               <a:t>按一下以編輯母片文字樣式</a:t>
             </a:r>
           </a:p>
@@ -2256,7 +2234,7 @@
             <a:fld id="{9C2E27BE-7C78-453E-8D49-6C3E6F394594}" type="datetimeFigureOut">
               <a:rPr lang="zh-TW" altLang="en-US" smtClean="0"/>
               <a:pPr/>
-              <a:t>2020/12/15</a:t>
+              <a:t>2025/2/13</a:t>
             </a:fld>
             <a:endParaRPr lang="zh-TW" altLang="en-US"/>
           </a:p>
@@ -2355,10 +2333,9 @@
           </a:lstStyle>
           <a:p>
             <a:r>
-              <a:rPr lang="zh-TW" altLang="en-US" smtClean="0"/>
+              <a:rPr lang="zh-TW" altLang="en-US"/>
               <a:t>按一下以編輯母片標題樣式</a:t>
             </a:r>
-            <a:endParaRPr lang="zh-TW" altLang="en-US"/>
           </a:p>
         </p:txBody>
       </p:sp>
@@ -2420,10 +2397,9 @@
           </a:lstStyle>
           <a:p>
             <a:r>
-              <a:rPr lang="zh-TW" altLang="en-US" smtClean="0"/>
+              <a:rPr lang="zh-TW" altLang="en-US"/>
               <a:t>按一下圖示以新增圖片</a:t>
             </a:r>
-            <a:endParaRPr lang="zh-TW" altLang="en-US"/>
           </a:p>
         </p:txBody>
       </p:sp>
@@ -2486,7 +2462,7 @@
           <a:p>
             <a:pPr lvl="0"/>
             <a:r>
-              <a:rPr lang="zh-TW" altLang="en-US" smtClean="0"/>
+              <a:rPr lang="zh-TW" altLang="en-US"/>
               <a:t>按一下以編輯母片文字樣式</a:t>
             </a:r>
           </a:p>
@@ -2510,7 +2486,7 @@
             <a:fld id="{9C2E27BE-7C78-453E-8D49-6C3E6F394594}" type="datetimeFigureOut">
               <a:rPr lang="zh-TW" altLang="en-US" smtClean="0"/>
               <a:pPr/>
-              <a:t>2020/12/15</a:t>
+              <a:t>2025/2/13</a:t>
             </a:fld>
             <a:endParaRPr lang="zh-TW" altLang="en-US"/>
           </a:p>
@@ -2620,10 +2596,9 @@
           <a:lstStyle/>
           <a:p>
             <a:r>
-              <a:rPr lang="zh-TW" altLang="en-US" smtClean="0"/>
+              <a:rPr lang="zh-TW" altLang="en-US"/>
               <a:t>按一下以編輯母片標題樣式</a:t>
             </a:r>
-            <a:endParaRPr lang="zh-TW" altLang="en-US"/>
           </a:p>
         </p:txBody>
       </p:sp>
@@ -2654,38 +2629,37 @@
           <a:p>
             <a:pPr lvl="0"/>
             <a:r>
-              <a:rPr lang="zh-TW" altLang="en-US" smtClean="0"/>
+              <a:rPr lang="zh-TW" altLang="en-US"/>
               <a:t>按一下以編輯母片文字樣式</a:t>
             </a:r>
           </a:p>
           <a:p>
             <a:pPr lvl="1"/>
             <a:r>
-              <a:rPr lang="zh-TW" altLang="en-US" smtClean="0"/>
+              <a:rPr lang="zh-TW" altLang="en-US"/>
               <a:t>第二層</a:t>
             </a:r>
           </a:p>
           <a:p>
             <a:pPr lvl="2"/>
             <a:r>
-              <a:rPr lang="zh-TW" altLang="en-US" smtClean="0"/>
+              <a:rPr lang="zh-TW" altLang="en-US"/>
               <a:t>第三層</a:t>
             </a:r>
           </a:p>
           <a:p>
             <a:pPr lvl="3"/>
             <a:r>
-              <a:rPr lang="zh-TW" altLang="en-US" smtClean="0"/>
+              <a:rPr lang="zh-TW" altLang="en-US"/>
               <a:t>第四層</a:t>
             </a:r>
           </a:p>
           <a:p>
             <a:pPr lvl="4"/>
             <a:r>
-              <a:rPr lang="zh-TW" altLang="en-US" smtClean="0"/>
+              <a:rPr lang="zh-TW" altLang="en-US"/>
               <a:t>第五層</a:t>
             </a:r>
-            <a:endParaRPr lang="zh-TW" altLang="en-US"/>
           </a:p>
         </p:txBody>
       </p:sp>
@@ -2725,7 +2699,7 @@
             <a:fld id="{9C2E27BE-7C78-453E-8D49-6C3E6F394594}" type="datetimeFigureOut">
               <a:rPr lang="zh-TW" altLang="en-US" smtClean="0"/>
               <a:pPr/>
-              <a:t>2020/12/15</a:t>
+              <a:t>2025/2/13</a:t>
             </a:fld>
             <a:endParaRPr lang="zh-TW" altLang="en-US"/>
           </a:p>
@@ -3098,7 +3072,7 @@
       </p:grpSpPr>
       <p:sp>
         <p:nvSpPr>
-          <p:cNvPr id="2" name="標題 1"/>
+          <p:cNvPr id="4" name="標題 3"/>
           <p:cNvSpPr>
             <a:spLocks noGrp="1"/>
           </p:cNvSpPr>
@@ -3106,636 +3080,73 @@
             <p:ph type="title"/>
           </p:nvPr>
         </p:nvSpPr>
-        <p:spPr/>
-        <p:txBody>
-          <a:bodyPr>
-            <a:normAutofit/>
-          </a:bodyPr>
-          <a:lstStyle/>
-          <a:p>
-            <a:r>
-              <a:rPr lang="zh-TW" altLang="en-US" sz="5400" b="1" dirty="0" smtClean="0">
-                <a:solidFill>
-                  <a:srgbClr val="660033"/>
-                </a:solidFill>
-                <a:latin typeface="微軟正黑體" pitchFamily="34" charset="-120"/>
-                <a:ea typeface="微軟正黑體" pitchFamily="34" charset="-120"/>
-                <a:cs typeface="+mn-cs"/>
-              </a:rPr>
-              <a:t>在祂沒有難成的事</a:t>
-            </a:r>
-          </a:p>
-        </p:txBody>
-      </p:sp>
-      <p:sp>
-        <p:nvSpPr>
-          <p:cNvPr id="3" name="內容版面配置區 2"/>
-          <p:cNvSpPr>
-            <a:spLocks noGrp="1"/>
-          </p:cNvSpPr>
-          <p:nvPr>
-            <p:ph idx="1"/>
-          </p:nvPr>
-        </p:nvSpPr>
-        <p:spPr/>
+        <p:spPr>
+          <a:xfrm>
+            <a:off x="0" y="2857513"/>
+            <a:ext cx="12192000" cy="1143000"/>
+          </a:xfrm>
+        </p:spPr>
         <p:txBody>
           <a:bodyPr>
             <a:noAutofit/>
           </a:bodyPr>
           <a:lstStyle/>
           <a:p>
-            <a:pPr algn="ctr">
-              <a:buNone/>
-            </a:pPr>
-            <a:r>
-              <a:rPr lang="zh-TW" altLang="en-US" sz="6400" b="1" dirty="0" smtClean="0">
-                <a:solidFill>
-                  <a:srgbClr val="660033"/>
-                </a:solidFill>
-                <a:latin typeface="微軟正黑體" pitchFamily="34" charset="-120"/>
-                <a:ea typeface="微軟正黑體" pitchFamily="34" charset="-120"/>
-              </a:rPr>
-              <a:t>不論有多大有多難的事  </a:t>
-            </a:r>
-            <a:endParaRPr lang="en-US" altLang="zh-TW" sz="6400" b="1" dirty="0" smtClean="0">
-              <a:solidFill>
-                <a:srgbClr val="660033"/>
-              </a:solidFill>
-              <a:latin typeface="微軟正黑體" pitchFamily="34" charset="-120"/>
-              <a:ea typeface="微軟正黑體" pitchFamily="34" charset="-120"/>
-            </a:endParaRPr>
-          </a:p>
-          <a:p>
-            <a:pPr algn="ctr">
-              <a:buNone/>
-            </a:pPr>
-            <a:r>
-              <a:rPr lang="zh-TW" altLang="en-US" sz="6400" b="1" dirty="0" smtClean="0">
-                <a:solidFill>
-                  <a:srgbClr val="660033"/>
-                </a:solidFill>
-                <a:latin typeface="微軟正黑體" pitchFamily="34" charset="-120"/>
-                <a:ea typeface="微軟正黑體" pitchFamily="34" charset="-120"/>
-              </a:rPr>
-              <a:t>交托在全能的上帝手裡</a:t>
-            </a:r>
-            <a:endParaRPr lang="en-US" altLang="zh-TW" sz="6400" b="1" dirty="0" smtClean="0">
-              <a:solidFill>
-                <a:srgbClr val="660033"/>
-              </a:solidFill>
-              <a:latin typeface="微軟正黑體" pitchFamily="34" charset="-120"/>
-              <a:ea typeface="微軟正黑體" pitchFamily="34" charset="-120"/>
-            </a:endParaRPr>
-          </a:p>
-          <a:p>
-            <a:pPr algn="ctr">
-              <a:buNone/>
-            </a:pPr>
-            <a:r>
-              <a:rPr lang="zh-TW" altLang="en-US" sz="6400" b="1" dirty="0" smtClean="0">
-                <a:solidFill>
-                  <a:srgbClr val="660033"/>
-                </a:solidFill>
-                <a:latin typeface="微軟正黑體" pitchFamily="34" charset="-120"/>
-                <a:ea typeface="微軟正黑體" pitchFamily="34" charset="-120"/>
-              </a:rPr>
-              <a:t>不論有多大有多難的事 </a:t>
-            </a:r>
-            <a:endParaRPr lang="en-US" altLang="zh-TW" sz="6400" b="1" dirty="0" smtClean="0">
-              <a:solidFill>
-                <a:srgbClr val="660033"/>
-              </a:solidFill>
-              <a:latin typeface="微軟正黑體" pitchFamily="34" charset="-120"/>
-              <a:ea typeface="微軟正黑體" pitchFamily="34" charset="-120"/>
-            </a:endParaRPr>
-          </a:p>
-          <a:p>
-            <a:pPr algn="ctr">
-              <a:buNone/>
-            </a:pPr>
-            <a:r>
-              <a:rPr lang="zh-TW" altLang="en-US" sz="6400" b="1" dirty="0" smtClean="0">
-                <a:solidFill>
-                  <a:srgbClr val="660033"/>
-                </a:solidFill>
-                <a:latin typeface="微軟正黑體" pitchFamily="34" charset="-120"/>
-                <a:ea typeface="微軟正黑體" pitchFamily="34" charset="-120"/>
-              </a:rPr>
-              <a:t> 交托在上帝手裡</a:t>
-            </a:r>
-            <a:endParaRPr lang="zh-TW" altLang="en-US" sz="6400" b="1" dirty="0">
-              <a:solidFill>
-                <a:srgbClr val="660033"/>
-              </a:solidFill>
-              <a:latin typeface="微軟正黑體" pitchFamily="34" charset="-120"/>
-              <a:ea typeface="微軟正黑體" pitchFamily="34" charset="-120"/>
-            </a:endParaRPr>
-          </a:p>
-        </p:txBody>
-      </p:sp>
-    </p:spTree>
-  </p:cSld>
-  <p:clrMapOvr>
-    <a:masterClrMapping/>
-  </p:clrMapOvr>
-</p:sld>
-</file>
-
-<file path=ppt/slides/slide10.xml><?xml version="1.0" encoding="utf-8"?>
-<p:sld xmlns:a="http://schemas.openxmlformats.org/drawingml/2006/main" xmlns:r="http://schemas.openxmlformats.org/officeDocument/2006/relationships" xmlns:p="http://schemas.openxmlformats.org/presentationml/2006/main">
-  <p:cSld>
-    <p:spTree>
-      <p:nvGrpSpPr>
-        <p:cNvPr id="1" name=""/>
-        <p:cNvGrpSpPr/>
-        <p:nvPr/>
-      </p:nvGrpSpPr>
-      <p:grpSpPr>
-        <a:xfrm>
-          <a:off x="0" y="0"/>
-          <a:ext cx="0" cy="0"/>
-          <a:chOff x="0" y="0"/>
-          <a:chExt cx="0" cy="0"/>
-        </a:xfrm>
-      </p:grpSpPr>
-      <p:sp>
-        <p:nvSpPr>
-          <p:cNvPr id="5" name="內容版面配置區 4"/>
-          <p:cNvSpPr>
-            <a:spLocks noGrp="1"/>
-          </p:cNvSpPr>
-          <p:nvPr>
-            <p:ph idx="1"/>
-          </p:nvPr>
-        </p:nvSpPr>
-        <p:spPr>
-          <a:xfrm>
-            <a:off x="0" y="2084853"/>
-            <a:ext cx="12192000" cy="2404863"/>
-          </a:xfrm>
-        </p:spPr>
-        <p:txBody>
-          <a:bodyPr anchor="ctr">
-            <a:normAutofit/>
-          </a:bodyPr>
-          <a:lstStyle/>
-          <a:p>
-            <a:pPr algn="ctr">
-              <a:buNone/>
-            </a:pPr>
-            <a:r>
-              <a:rPr lang="zh-TW" altLang="en-US" sz="6400" b="1" dirty="0">
+            <a:r>
+              <a:rPr lang="zh-TW" altLang="en-US" sz="7200" b="1" i="1" dirty="0">
                 <a:solidFill>
                   <a:srgbClr val="000066"/>
                 </a:solidFill>
-                <a:latin typeface="微軟正黑體" pitchFamily="34" charset="-120"/>
-                <a:ea typeface="微軟正黑體" pitchFamily="34" charset="-120"/>
-              </a:rPr>
-              <a:t>在</a:t>
-            </a:r>
-            <a:r>
-              <a:rPr lang="zh-CN" altLang="en-US" sz="6400" b="1" dirty="0">
-                <a:solidFill>
-                  <a:srgbClr val="000066"/>
-                </a:solidFill>
-                <a:latin typeface="微軟正黑體" pitchFamily="34" charset="-120"/>
-                <a:ea typeface="微軟正黑體" pitchFamily="34" charset="-120"/>
-              </a:rPr>
-              <a:t>袮</a:t>
-            </a:r>
-            <a:r>
-              <a:rPr lang="zh-TW" altLang="en-US" sz="6400" b="1" dirty="0">
-                <a:solidFill>
-                  <a:srgbClr val="000066"/>
-                </a:solidFill>
-                <a:latin typeface="微軟正黑體" pitchFamily="34" charset="-120"/>
-                <a:ea typeface="微軟正黑體" pitchFamily="34" charset="-120"/>
-              </a:rPr>
-              <a:t>面前有滿足的喜樂</a:t>
-            </a:r>
-            <a:endParaRPr lang="en-US" altLang="zh-TW" sz="6400" b="1" dirty="0">
-              <a:solidFill>
-                <a:srgbClr val="000066"/>
-              </a:solidFill>
-              <a:latin typeface="微軟正黑體" pitchFamily="34" charset="-120"/>
-              <a:ea typeface="微軟正黑體" pitchFamily="34" charset="-120"/>
-            </a:endParaRPr>
-          </a:p>
-          <a:p>
-            <a:pPr algn="ctr">
-              <a:buNone/>
-            </a:pPr>
-            <a:r>
-              <a:rPr lang="zh-TW" altLang="en-US" sz="6400" b="1" dirty="0">
-                <a:solidFill>
-                  <a:srgbClr val="000066"/>
-                </a:solidFill>
-                <a:latin typeface="微軟正黑體" pitchFamily="34" charset="-120"/>
-                <a:ea typeface="微軟正黑體" pitchFamily="34" charset="-120"/>
-              </a:rPr>
-              <a:t>在</a:t>
-            </a:r>
-            <a:r>
-              <a:rPr lang="zh-CN" altLang="en-US" sz="6400" b="1" dirty="0">
-                <a:solidFill>
-                  <a:srgbClr val="000066"/>
-                </a:solidFill>
-                <a:latin typeface="微軟正黑體" pitchFamily="34" charset="-120"/>
-                <a:ea typeface="微軟正黑體" pitchFamily="34" charset="-120"/>
-              </a:rPr>
-              <a:t>袮</a:t>
-            </a:r>
-            <a:r>
-              <a:rPr lang="zh-TW" altLang="en-US" sz="6400" b="1" dirty="0">
-                <a:solidFill>
-                  <a:srgbClr val="000066"/>
-                </a:solidFill>
-                <a:latin typeface="微軟正黑體" pitchFamily="34" charset="-120"/>
-                <a:ea typeface="微軟正黑體" pitchFamily="34" charset="-120"/>
-              </a:rPr>
-              <a:t>右手中有永遠的福樂</a:t>
-            </a:r>
-            <a:endParaRPr lang="en-US" altLang="zh-TW" sz="6400" b="1" dirty="0">
-              <a:solidFill>
-                <a:srgbClr val="000066"/>
-              </a:solidFill>
-              <a:latin typeface="微軟正黑體" pitchFamily="34" charset="-120"/>
-              <a:ea typeface="微軟正黑體" pitchFamily="34" charset="-120"/>
-            </a:endParaRPr>
-          </a:p>
-        </p:txBody>
-      </p:sp>
-    </p:spTree>
-    <p:extLst>
-      <p:ext uri="{BB962C8B-B14F-4D97-AF65-F5344CB8AC3E}">
-        <p14:creationId xmlns:p14="http://schemas.microsoft.com/office/powerpoint/2010/main" xmlns="" val="1026985615"/>
-      </p:ext>
-    </p:extLst>
-  </p:cSld>
-  <p:clrMapOvr>
-    <a:masterClrMapping/>
-  </p:clrMapOvr>
-</p:sld>
-</file>
-
-<file path=ppt/slides/slide11.xml><?xml version="1.0" encoding="utf-8"?>
-<p:sld xmlns:a="http://schemas.openxmlformats.org/drawingml/2006/main" xmlns:r="http://schemas.openxmlformats.org/officeDocument/2006/relationships" xmlns:p="http://schemas.openxmlformats.org/presentationml/2006/main">
-  <p:cSld>
-    <p:spTree>
-      <p:nvGrpSpPr>
-        <p:cNvPr id="1" name=""/>
-        <p:cNvGrpSpPr/>
-        <p:nvPr/>
-      </p:nvGrpSpPr>
-      <p:grpSpPr>
-        <a:xfrm>
-          <a:off x="0" y="0"/>
-          <a:ext cx="0" cy="0"/>
-          <a:chOff x="0" y="0"/>
-          <a:chExt cx="0" cy="0"/>
-        </a:xfrm>
-      </p:grpSpPr>
-      <p:sp>
-        <p:nvSpPr>
-          <p:cNvPr id="5" name="內容版面配置區 4"/>
-          <p:cNvSpPr>
-            <a:spLocks noGrp="1"/>
-          </p:cNvSpPr>
-          <p:nvPr>
-            <p:ph idx="1"/>
-          </p:nvPr>
-        </p:nvSpPr>
-        <p:spPr>
-          <a:xfrm>
-            <a:off x="0" y="2084853"/>
-            <a:ext cx="12192000" cy="2404863"/>
-          </a:xfrm>
-        </p:spPr>
-        <p:txBody>
-          <a:bodyPr anchor="ctr">
-            <a:normAutofit/>
-          </a:bodyPr>
-          <a:lstStyle/>
-          <a:p>
-            <a:pPr algn="ctr">
-              <a:buNone/>
-            </a:pPr>
-            <a:r>
-              <a:rPr lang="zh-TW" altLang="en-US" sz="6400" b="1" dirty="0">
-                <a:solidFill>
-                  <a:srgbClr val="000066"/>
-                </a:solidFill>
-                <a:latin typeface="微軟正黑體" pitchFamily="34" charset="-120"/>
-                <a:ea typeface="微軟正黑體" pitchFamily="34" charset="-120"/>
-              </a:rPr>
-              <a:t>量給我的地界  坐落佳美之處 </a:t>
-            </a:r>
-            <a:endParaRPr lang="en-US" altLang="zh-TW" sz="6400" b="1" dirty="0">
-              <a:solidFill>
-                <a:srgbClr val="000066"/>
-              </a:solidFill>
-              <a:latin typeface="微軟正黑體" pitchFamily="34" charset="-120"/>
-              <a:ea typeface="微軟正黑體" pitchFamily="34" charset="-120"/>
-            </a:endParaRPr>
-          </a:p>
-          <a:p>
-            <a:pPr algn="ctr">
-              <a:buNone/>
-            </a:pPr>
-            <a:r>
-              <a:rPr lang="zh-TW" altLang="en-US" sz="6400" b="1" dirty="0">
-                <a:solidFill>
-                  <a:srgbClr val="000066"/>
-                </a:solidFill>
-                <a:latin typeface="微軟正黑體" pitchFamily="34" charset="-120"/>
-                <a:ea typeface="微軟正黑體" pitchFamily="34" charset="-120"/>
-              </a:rPr>
-              <a:t>我的產業實在美好</a:t>
-            </a:r>
-          </a:p>
-        </p:txBody>
-      </p:sp>
-    </p:spTree>
-    <p:extLst>
-      <p:ext uri="{BB962C8B-B14F-4D97-AF65-F5344CB8AC3E}">
-        <p14:creationId xmlns:p14="http://schemas.microsoft.com/office/powerpoint/2010/main" xmlns="" val="2785632229"/>
-      </p:ext>
-    </p:extLst>
-  </p:cSld>
-  <p:clrMapOvr>
-    <a:masterClrMapping/>
-  </p:clrMapOvr>
-</p:sld>
-</file>
-
-<file path=ppt/slides/slide12.xml><?xml version="1.0" encoding="utf-8"?>
-<p:sld xmlns:a="http://schemas.openxmlformats.org/drawingml/2006/main" xmlns:r="http://schemas.openxmlformats.org/officeDocument/2006/relationships" xmlns:p="http://schemas.openxmlformats.org/presentationml/2006/main">
-  <p:cSld>
-    <p:spTree>
-      <p:nvGrpSpPr>
-        <p:cNvPr id="1" name=""/>
-        <p:cNvGrpSpPr/>
-        <p:nvPr/>
-      </p:nvGrpSpPr>
-      <p:grpSpPr>
-        <a:xfrm>
-          <a:off x="0" y="0"/>
-          <a:ext cx="0" cy="0"/>
-          <a:chOff x="0" y="0"/>
-          <a:chExt cx="0" cy="0"/>
-        </a:xfrm>
-      </p:grpSpPr>
-      <p:sp>
-        <p:nvSpPr>
-          <p:cNvPr id="5" name="內容版面配置區 4"/>
-          <p:cNvSpPr>
-            <a:spLocks noGrp="1"/>
-          </p:cNvSpPr>
-          <p:nvPr>
-            <p:ph idx="1"/>
-          </p:nvPr>
-        </p:nvSpPr>
-        <p:spPr>
-          <a:xfrm>
-            <a:off x="0" y="2084853"/>
-            <a:ext cx="12192000" cy="2404863"/>
-          </a:xfrm>
-        </p:spPr>
-        <p:txBody>
-          <a:bodyPr anchor="ctr">
-            <a:normAutofit/>
-          </a:bodyPr>
-          <a:lstStyle/>
-          <a:p>
-            <a:pPr algn="ctr">
-              <a:buNone/>
-            </a:pPr>
-            <a:r>
-              <a:rPr lang="zh-TW" altLang="en-US" sz="6400" b="1" dirty="0">
-                <a:solidFill>
-                  <a:srgbClr val="000066"/>
-                </a:solidFill>
-                <a:latin typeface="微軟正黑體" pitchFamily="34" charset="-120"/>
-                <a:ea typeface="微軟正黑體" pitchFamily="34" charset="-120"/>
-              </a:rPr>
-              <a:t>在</a:t>
-            </a:r>
-            <a:r>
-              <a:rPr lang="zh-CN" altLang="en-US" sz="6400" b="1" dirty="0">
-                <a:solidFill>
-                  <a:srgbClr val="000066"/>
-                </a:solidFill>
-                <a:latin typeface="微軟正黑體" pitchFamily="34" charset="-120"/>
-                <a:ea typeface="微軟正黑體" pitchFamily="34" charset="-120"/>
-              </a:rPr>
-              <a:t>袮</a:t>
-            </a:r>
-            <a:r>
-              <a:rPr lang="zh-TW" altLang="en-US" sz="6400" b="1" dirty="0">
-                <a:solidFill>
-                  <a:srgbClr val="000066"/>
-                </a:solidFill>
-                <a:latin typeface="微軟正黑體" pitchFamily="34" charset="-120"/>
-                <a:ea typeface="微軟正黑體" pitchFamily="34" charset="-120"/>
-              </a:rPr>
-              <a:t>面前有滿足的喜樂</a:t>
-            </a:r>
-            <a:endParaRPr lang="en-US" altLang="zh-TW" sz="6400" b="1" dirty="0">
-              <a:solidFill>
-                <a:srgbClr val="000066"/>
-              </a:solidFill>
-              <a:latin typeface="微軟正黑體" pitchFamily="34" charset="-120"/>
-              <a:ea typeface="微軟正黑體" pitchFamily="34" charset="-120"/>
-            </a:endParaRPr>
-          </a:p>
-          <a:p>
-            <a:pPr algn="ctr">
-              <a:buNone/>
-            </a:pPr>
-            <a:r>
-              <a:rPr lang="zh-TW" altLang="en-US" sz="6400" b="1" dirty="0">
-                <a:solidFill>
-                  <a:srgbClr val="000066"/>
-                </a:solidFill>
-                <a:latin typeface="微軟正黑體" pitchFamily="34" charset="-120"/>
-                <a:ea typeface="微軟正黑體" pitchFamily="34" charset="-120"/>
-              </a:rPr>
-              <a:t>在</a:t>
-            </a:r>
-            <a:r>
-              <a:rPr lang="zh-CN" altLang="en-US" sz="6400" b="1" dirty="0">
-                <a:solidFill>
-                  <a:srgbClr val="000066"/>
-                </a:solidFill>
-                <a:latin typeface="微軟正黑體" pitchFamily="34" charset="-120"/>
-                <a:ea typeface="微軟正黑體" pitchFamily="34" charset="-120"/>
-              </a:rPr>
-              <a:t>袮</a:t>
-            </a:r>
-            <a:r>
-              <a:rPr lang="zh-TW" altLang="en-US" sz="6400" b="1" dirty="0">
-                <a:solidFill>
-                  <a:srgbClr val="000066"/>
-                </a:solidFill>
-                <a:latin typeface="微軟正黑體" pitchFamily="34" charset="-120"/>
-                <a:ea typeface="微軟正黑體" pitchFamily="34" charset="-120"/>
-              </a:rPr>
-              <a:t>右手中有永遠的福樂</a:t>
-            </a:r>
-            <a:endParaRPr lang="en-US" altLang="zh-TW" sz="6400" b="1" dirty="0">
-              <a:solidFill>
-                <a:srgbClr val="000066"/>
-              </a:solidFill>
-              <a:latin typeface="微軟正黑體" pitchFamily="34" charset="-120"/>
-              <a:ea typeface="微軟正黑體" pitchFamily="34" charset="-120"/>
-            </a:endParaRPr>
-          </a:p>
-        </p:txBody>
-      </p:sp>
-    </p:spTree>
-    <p:extLst>
-      <p:ext uri="{BB962C8B-B14F-4D97-AF65-F5344CB8AC3E}">
-        <p14:creationId xmlns:p14="http://schemas.microsoft.com/office/powerpoint/2010/main" xmlns="" val="1469619297"/>
-      </p:ext>
-    </p:extLst>
-  </p:cSld>
-  <p:clrMapOvr>
-    <a:masterClrMapping/>
-  </p:clrMapOvr>
-</p:sld>
-</file>
-
-<file path=ppt/slides/slide13.xml><?xml version="1.0" encoding="utf-8"?>
-<p:sld xmlns:a="http://schemas.openxmlformats.org/drawingml/2006/main" xmlns:r="http://schemas.openxmlformats.org/officeDocument/2006/relationships" xmlns:p="http://schemas.openxmlformats.org/presentationml/2006/main">
-  <p:cSld>
-    <p:spTree>
-      <p:nvGrpSpPr>
-        <p:cNvPr id="1" name=""/>
-        <p:cNvGrpSpPr/>
-        <p:nvPr/>
-      </p:nvGrpSpPr>
-      <p:grpSpPr>
-        <a:xfrm>
-          <a:off x="0" y="0"/>
-          <a:ext cx="0" cy="0"/>
-          <a:chOff x="0" y="0"/>
-          <a:chExt cx="0" cy="0"/>
-        </a:xfrm>
-      </p:grpSpPr>
-      <p:sp>
-        <p:nvSpPr>
-          <p:cNvPr id="5" name="內容版面配置區 4"/>
-          <p:cNvSpPr>
-            <a:spLocks noGrp="1"/>
-          </p:cNvSpPr>
-          <p:nvPr>
-            <p:ph idx="1"/>
-          </p:nvPr>
-        </p:nvSpPr>
-        <p:spPr>
-          <a:xfrm>
-            <a:off x="0" y="2084853"/>
-            <a:ext cx="12192000" cy="2404863"/>
-          </a:xfrm>
-        </p:spPr>
-        <p:txBody>
-          <a:bodyPr anchor="ctr">
-            <a:normAutofit/>
-          </a:bodyPr>
-          <a:lstStyle/>
-          <a:p>
-            <a:pPr algn="ctr">
-              <a:buNone/>
-            </a:pPr>
-            <a:r>
-              <a:rPr lang="zh-CN" altLang="en-US" sz="6400" b="1" dirty="0">
-                <a:solidFill>
-                  <a:srgbClr val="000066"/>
-                </a:solidFill>
-                <a:latin typeface="微軟正黑體" pitchFamily="34" charset="-120"/>
-                <a:ea typeface="微軟正黑體" pitchFamily="34" charset="-120"/>
-              </a:rPr>
-              <a:t>袮</a:t>
-            </a:r>
-            <a:r>
-              <a:rPr lang="zh-TW" altLang="en-US" sz="6400" b="1" dirty="0">
-                <a:solidFill>
-                  <a:srgbClr val="000066"/>
-                </a:solidFill>
-                <a:latin typeface="微軟正黑體" pitchFamily="34" charset="-120"/>
-                <a:ea typeface="微軟正黑體" pitchFamily="34" charset="-120"/>
-              </a:rPr>
-              <a:t>是我的主  好處不在</a:t>
-            </a:r>
-            <a:r>
-              <a:rPr lang="zh-CN" altLang="en-US" sz="6400" b="1" dirty="0">
-                <a:solidFill>
-                  <a:srgbClr val="000066"/>
-                </a:solidFill>
-                <a:latin typeface="微軟正黑體" pitchFamily="34" charset="-120"/>
-                <a:ea typeface="微軟正黑體" pitchFamily="34" charset="-120"/>
-              </a:rPr>
-              <a:t>袮</a:t>
-            </a:r>
-            <a:r>
-              <a:rPr lang="zh-TW" altLang="en-US" sz="6400" b="1" dirty="0">
-                <a:solidFill>
-                  <a:srgbClr val="000066"/>
-                </a:solidFill>
-                <a:latin typeface="微軟正黑體" pitchFamily="34" charset="-120"/>
-                <a:ea typeface="微軟正黑體" pitchFamily="34" charset="-120"/>
-              </a:rPr>
-              <a:t>以外 </a:t>
-            </a:r>
-            <a:endParaRPr lang="en-US" altLang="zh-TW" sz="6400" b="1" dirty="0">
-              <a:solidFill>
-                <a:srgbClr val="000066"/>
-              </a:solidFill>
-              <a:latin typeface="微軟正黑體" pitchFamily="34" charset="-120"/>
-              <a:ea typeface="微軟正黑體" pitchFamily="34" charset="-120"/>
-            </a:endParaRPr>
-          </a:p>
-          <a:p>
-            <a:pPr algn="ctr">
-              <a:buNone/>
-            </a:pPr>
-            <a:r>
-              <a:rPr lang="zh-TW" altLang="en-US" sz="6400" b="1" dirty="0">
-                <a:solidFill>
-                  <a:srgbClr val="000066"/>
-                </a:solidFill>
+                <a:effectLst>
+                  <a:outerShdw blurRad="38100" dist="38100" dir="2700000" algn="tl">
+                    <a:srgbClr val="000000">
+                      <a:alpha val="43137"/>
+                    </a:srgbClr>
+                  </a:outerShdw>
+                </a:effectLst>
                 <a:latin typeface="微軟正黑體" pitchFamily="34" charset="-120"/>
                 <a:ea typeface="微軟正黑體" pitchFamily="34" charset="-120"/>
               </a:rPr>
               <a:t>遇見</a:t>
             </a:r>
             <a:r>
-              <a:rPr lang="zh-CN" altLang="en-US" sz="6400" b="1" dirty="0">
+              <a:rPr lang="zh-CN" altLang="en-US" sz="7200" b="1" i="1" dirty="0">
                 <a:solidFill>
                   <a:srgbClr val="000066"/>
                 </a:solidFill>
+                <a:effectLst>
+                  <a:outerShdw blurRad="38100" dist="38100" dir="2700000" algn="tl">
+                    <a:srgbClr val="000000">
+                      <a:alpha val="43137"/>
+                    </a:srgbClr>
+                  </a:outerShdw>
+                </a:effectLst>
                 <a:latin typeface="微軟正黑體" pitchFamily="34" charset="-120"/>
                 <a:ea typeface="微軟正黑體" pitchFamily="34" charset="-120"/>
               </a:rPr>
-              <a:t>袮  </a:t>
-            </a:r>
-            <a:r>
-              <a:rPr lang="zh-TW" altLang="en-US" sz="6400" b="1" dirty="0">
-                <a:solidFill>
-                  <a:srgbClr val="000066"/>
-                </a:solidFill>
-                <a:latin typeface="微軟正黑體" pitchFamily="34" charset="-120"/>
-                <a:ea typeface="微軟正黑體" pitchFamily="34" charset="-120"/>
-              </a:rPr>
-              <a:t>我就遇見幸福</a:t>
-            </a:r>
+              <a:t>祢</a:t>
+            </a:r>
+            <a:endParaRPr lang="zh-TW" altLang="en-US" sz="7200" b="1" i="1" dirty="0">
+              <a:solidFill>
+                <a:srgbClr val="000066"/>
+              </a:solidFill>
+              <a:effectLst>
+                <a:outerShdw blurRad="38100" dist="38100" dir="2700000" algn="tl">
+                  <a:srgbClr val="000000">
+                    <a:alpha val="43137"/>
+                  </a:srgbClr>
+                </a:outerShdw>
+              </a:effectLst>
+              <a:latin typeface="微軟正黑體" pitchFamily="34" charset="-120"/>
+              <a:ea typeface="微軟正黑體" pitchFamily="34" charset="-120"/>
+            </a:endParaRPr>
           </a:p>
         </p:txBody>
       </p:sp>
     </p:spTree>
     <p:extLst>
       <p:ext uri="{BB962C8B-B14F-4D97-AF65-F5344CB8AC3E}">
-        <p14:creationId xmlns:p14="http://schemas.microsoft.com/office/powerpoint/2010/main" xmlns="" val="377867710"/>
+        <p14:creationId xmlns:p14="http://schemas.microsoft.com/office/powerpoint/2010/main" val="2799653032"/>
       </p:ext>
     </p:extLst>
   </p:cSld>
@@ -3764,68 +3175,72 @@
       </p:grpSpPr>
       <p:sp>
         <p:nvSpPr>
-          <p:cNvPr id="2" name="標題 1"/>
-          <p:cNvSpPr>
-            <a:spLocks noGrp="1"/>
-          </p:cNvSpPr>
-          <p:nvPr>
-            <p:ph type="title"/>
-          </p:nvPr>
-        </p:nvSpPr>
-        <p:spPr/>
-        <p:txBody>
-          <a:bodyPr>
+          <p:cNvPr id="5" name="內容版面配置區 4"/>
+          <p:cNvSpPr>
+            <a:spLocks noGrp="1"/>
+          </p:cNvSpPr>
+          <p:nvPr>
+            <p:ph idx="1"/>
+          </p:nvPr>
+        </p:nvSpPr>
+        <p:spPr>
+          <a:xfrm>
+            <a:off x="0" y="2084853"/>
+            <a:ext cx="12192000" cy="2404863"/>
+          </a:xfrm>
+        </p:spPr>
+        <p:txBody>
+          <a:bodyPr anchor="ctr">
             <a:normAutofit/>
           </a:bodyPr>
           <a:lstStyle/>
           <a:p>
-            <a:r>
-              <a:rPr lang="zh-TW" altLang="en-US" sz="5400" b="1" dirty="0" smtClean="0">
-                <a:solidFill>
-                  <a:srgbClr val="660033"/>
-                </a:solidFill>
-                <a:latin typeface="微軟正黑體" pitchFamily="34" charset="-120"/>
-                <a:ea typeface="微軟正黑體" pitchFamily="34" charset="-120"/>
-                <a:cs typeface="+mn-cs"/>
-              </a:rPr>
-              <a:t>在祂沒有難成的事</a:t>
-            </a:r>
-          </a:p>
-        </p:txBody>
-      </p:sp>
-      <p:sp>
-        <p:nvSpPr>
-          <p:cNvPr id="3" name="內容版面配置區 2"/>
-          <p:cNvSpPr>
-            <a:spLocks noGrp="1"/>
-          </p:cNvSpPr>
-          <p:nvPr>
-            <p:ph idx="1"/>
-          </p:nvPr>
-        </p:nvSpPr>
-        <p:spPr/>
-        <p:txBody>
-          <a:bodyPr>
-            <a:noAutofit/>
-          </a:bodyPr>
-          <a:lstStyle/>
-          <a:p>
             <a:pPr algn="ctr">
               <a:buNone/>
             </a:pPr>
             <a:r>
-              <a:rPr lang="zh-TW" altLang="en-US" sz="6400" b="1" dirty="0" smtClean="0">
-                <a:solidFill>
-                  <a:srgbClr val="660033"/>
+              <a:rPr lang="zh-TW" altLang="en-US" sz="6400" b="1" dirty="0">
+                <a:solidFill>
+                  <a:srgbClr val="000066"/>
                 </a:solidFill>
                 <a:latin typeface="微軟正黑體" pitchFamily="34" charset="-120"/>
                 <a:ea typeface="微軟正黑體" pitchFamily="34" charset="-120"/>
               </a:rPr>
-              <a:t>看   看耶和華成就大事</a:t>
-            </a:r>
-            <a:endParaRPr lang="en-US" altLang="zh-TW" sz="6400" b="1" dirty="0" smtClean="0">
+              <a:t>當我遇見</a:t>
+            </a:r>
+            <a:r>
+              <a:rPr lang="zh-CN" altLang="en-US" sz="6400" b="1" dirty="0">
+                <a:solidFill>
+                  <a:srgbClr val="000066"/>
+                </a:solidFill>
+                <a:latin typeface="微軟正黑體" pitchFamily="34" charset="-120"/>
+                <a:ea typeface="微軟正黑體" pitchFamily="34" charset="-120"/>
+              </a:rPr>
+              <a:t>祢</a:t>
+            </a:r>
+            <a:r>
+              <a:rPr lang="en-US" altLang="zh-TW" sz="6400" b="1" dirty="0">
+                <a:solidFill>
+                  <a:srgbClr val="000066"/>
+                </a:solidFill>
+                <a:latin typeface="微軟正黑體" pitchFamily="34" charset="-120"/>
+                <a:ea typeface="微軟正黑體" pitchFamily="34" charset="-120"/>
+              </a:rPr>
+              <a:t>  </a:t>
+            </a:r>
+            <a:r>
+              <a:rPr lang="zh-TW" altLang="en-US" sz="6400" b="1" dirty="0">
+                <a:solidFill>
+                  <a:srgbClr val="000066"/>
+                </a:solidFill>
+                <a:latin typeface="微軟正黑體" pitchFamily="34" charset="-120"/>
+                <a:ea typeface="微軟正黑體" pitchFamily="34" charset="-120"/>
+              </a:rPr>
+              <a:t>使我夜間歌唱</a:t>
+            </a:r>
+            <a:endParaRPr lang="en-US" altLang="zh-TW" sz="6400" b="1" dirty="0">
               <a:solidFill>
-                <a:srgbClr val="660033"/>
+                <a:srgbClr val="000066"/>
               </a:solidFill>
               <a:latin typeface="微軟正黑體" pitchFamily="34" charset="-120"/>
               <a:ea typeface="微軟正黑體" pitchFamily="34" charset="-120"/>
@@ -3836,86 +3251,51 @@
               <a:buNone/>
             </a:pPr>
             <a:r>
-              <a:rPr lang="zh-TW" altLang="en-US" sz="6400" b="1" dirty="0" smtClean="0">
-                <a:solidFill>
-                  <a:srgbClr val="660033"/>
+              <a:rPr lang="zh-TW" altLang="en-US" sz="6400" b="1" dirty="0">
+                <a:solidFill>
+                  <a:srgbClr val="000066"/>
                 </a:solidFill>
                 <a:latin typeface="微軟正黑體" pitchFamily="34" charset="-120"/>
                 <a:ea typeface="微軟正黑體" pitchFamily="34" charset="-120"/>
               </a:rPr>
-              <a:t>祂說有就有   祂命立就</a:t>
-            </a:r>
-            <a:r>
-              <a:rPr lang="zh-TW" altLang="en-US" sz="6400" b="1" dirty="0" smtClean="0">
-                <a:solidFill>
-                  <a:srgbClr val="660033"/>
+              <a:t>超越一切環境  看見</a:t>
+            </a:r>
+            <a:r>
+              <a:rPr lang="zh-CN" altLang="en-US" sz="6400" b="1" dirty="0">
+                <a:solidFill>
+                  <a:srgbClr val="000066"/>
                 </a:solidFill>
                 <a:latin typeface="微軟正黑體" pitchFamily="34" charset="-120"/>
                 <a:ea typeface="微軟正黑體" pitchFamily="34" charset="-120"/>
               </a:rPr>
-              <a:t>立</a:t>
-            </a:r>
-            <a:endParaRPr lang="en-US" altLang="zh-TW" sz="6400" b="1" dirty="0" smtClean="0">
+              <a:t>祢</a:t>
+            </a:r>
+            <a:r>
+              <a:rPr lang="zh-TW" altLang="en-US" sz="6400" b="1" dirty="0">
+                <a:solidFill>
+                  <a:srgbClr val="000066"/>
+                </a:solidFill>
+                <a:latin typeface="微軟正黑體" pitchFamily="34" charset="-120"/>
+                <a:ea typeface="微軟正黑體" pitchFamily="34" charset="-120"/>
+              </a:rPr>
+              <a:t>的同在</a:t>
+            </a:r>
+            <a:endParaRPr lang="en-US" altLang="zh-TW" sz="6400" b="1" dirty="0">
               <a:solidFill>
-                <a:srgbClr val="660033"/>
+                <a:srgbClr val="000066"/>
               </a:solidFill>
               <a:latin typeface="微軟正黑體" pitchFamily="34" charset="-120"/>
               <a:ea typeface="微軟正黑體" pitchFamily="34" charset="-120"/>
             </a:endParaRPr>
           </a:p>
-          <a:p>
-            <a:pPr algn="ctr">
-              <a:buNone/>
-            </a:pPr>
-            <a:r>
-              <a:rPr lang="zh-TW" altLang="en-US" sz="6400" b="1" dirty="0" smtClean="0">
-                <a:solidFill>
-                  <a:srgbClr val="660033"/>
-                </a:solidFill>
-                <a:latin typeface="微軟正黑體" pitchFamily="34" charset="-120"/>
-                <a:ea typeface="微軟正黑體" pitchFamily="34" charset="-120"/>
-              </a:rPr>
-              <a:t>看   </a:t>
-            </a:r>
-            <a:r>
-              <a:rPr lang="zh-TW" altLang="en-US" sz="6400" b="1" dirty="0" smtClean="0">
-                <a:solidFill>
-                  <a:srgbClr val="660033"/>
-                </a:solidFill>
-                <a:latin typeface="微軟正黑體" pitchFamily="34" charset="-120"/>
-                <a:ea typeface="微軟正黑體" pitchFamily="34" charset="-120"/>
-              </a:rPr>
-              <a:t>看耶和華成就大事</a:t>
-            </a:r>
-            <a:r>
-              <a:rPr lang="en-US" altLang="zh-TW" sz="6400" b="1" dirty="0" smtClean="0">
-                <a:solidFill>
-                  <a:srgbClr val="660033"/>
-                </a:solidFill>
-                <a:latin typeface="微軟正黑體" pitchFamily="34" charset="-120"/>
-                <a:ea typeface="微軟正黑體" pitchFamily="34" charset="-120"/>
-              </a:rPr>
-              <a:t>  </a:t>
-            </a:r>
-          </a:p>
-          <a:p>
-            <a:pPr algn="ctr">
-              <a:buNone/>
-            </a:pPr>
-            <a:r>
-              <a:rPr lang="zh-TW" altLang="en-US" sz="6400" b="1" dirty="0" smtClean="0">
-                <a:solidFill>
-                  <a:srgbClr val="660033"/>
-                </a:solidFill>
-                <a:latin typeface="微軟正黑體" pitchFamily="34" charset="-120"/>
-                <a:ea typeface="微軟正黑體" pitchFamily="34" charset="-120"/>
-              </a:rPr>
-              <a:t>在祂沒有難成的事</a:t>
-            </a:r>
-          </a:p>
         </p:txBody>
       </p:sp>
     </p:spTree>
+    <p:extLst>
+      <p:ext uri="{BB962C8B-B14F-4D97-AF65-F5344CB8AC3E}">
+        <p14:creationId xmlns:p14="http://schemas.microsoft.com/office/powerpoint/2010/main" val="1037318506"/>
+      </p:ext>
+    </p:extLst>
   </p:cSld>
   <p:clrMapOvr>
     <a:masterClrMapping/>
@@ -3942,68 +3322,42 @@
       </p:grpSpPr>
       <p:sp>
         <p:nvSpPr>
-          <p:cNvPr id="2" name="標題 1"/>
-          <p:cNvSpPr>
-            <a:spLocks noGrp="1"/>
-          </p:cNvSpPr>
-          <p:nvPr>
-            <p:ph type="title"/>
-          </p:nvPr>
-        </p:nvSpPr>
-        <p:spPr/>
-        <p:txBody>
-          <a:bodyPr>
+          <p:cNvPr id="5" name="內容版面配置區 4"/>
+          <p:cNvSpPr>
+            <a:spLocks noGrp="1"/>
+          </p:cNvSpPr>
+          <p:nvPr>
+            <p:ph idx="1"/>
+          </p:nvPr>
+        </p:nvSpPr>
+        <p:spPr>
+          <a:xfrm>
+            <a:off x="0" y="2084853"/>
+            <a:ext cx="12192000" cy="2404863"/>
+          </a:xfrm>
+        </p:spPr>
+        <p:txBody>
+          <a:bodyPr anchor="ctr">
             <a:normAutofit/>
           </a:bodyPr>
           <a:lstStyle/>
           <a:p>
-            <a:r>
-              <a:rPr lang="zh-TW" altLang="en-US" sz="5400" b="1" dirty="0" smtClean="0">
-                <a:solidFill>
-                  <a:srgbClr val="660033"/>
-                </a:solidFill>
-                <a:latin typeface="微軟正黑體" pitchFamily="34" charset="-120"/>
-                <a:ea typeface="微軟正黑體" pitchFamily="34" charset="-120"/>
-                <a:cs typeface="+mn-cs"/>
-              </a:rPr>
-              <a:t>在祂沒有難成的事</a:t>
-            </a:r>
-          </a:p>
-        </p:txBody>
-      </p:sp>
-      <p:sp>
-        <p:nvSpPr>
-          <p:cNvPr id="3" name="內容版面配置區 2"/>
-          <p:cNvSpPr>
-            <a:spLocks noGrp="1"/>
-          </p:cNvSpPr>
-          <p:nvPr>
-            <p:ph idx="1"/>
-          </p:nvPr>
-        </p:nvSpPr>
-        <p:spPr/>
-        <p:txBody>
-          <a:bodyPr>
-            <a:noAutofit/>
-          </a:bodyPr>
-          <a:lstStyle/>
-          <a:p>
             <a:pPr algn="ctr">
               <a:buNone/>
             </a:pPr>
             <a:r>
-              <a:rPr lang="zh-TW" altLang="en-US" sz="6400" b="1" dirty="0" smtClean="0">
-                <a:solidFill>
-                  <a:srgbClr val="660033"/>
+              <a:rPr lang="zh-TW" altLang="en-US" sz="6400" b="1" dirty="0">
+                <a:solidFill>
+                  <a:srgbClr val="000066"/>
                 </a:solidFill>
                 <a:latin typeface="微軟正黑體" pitchFamily="34" charset="-120"/>
                 <a:ea typeface="微軟正黑體" pitchFamily="34" charset="-120"/>
               </a:rPr>
-              <a:t>哈～沒有難成的事</a:t>
-            </a:r>
-            <a:endParaRPr lang="en-US" altLang="zh-TW" sz="6400" b="1" dirty="0" smtClean="0">
+              <a:t>我的心歡喜  我的靈快樂</a:t>
+            </a:r>
+            <a:endParaRPr lang="en-US" altLang="zh-TW" sz="6400" b="1" dirty="0">
               <a:solidFill>
-                <a:srgbClr val="660033"/>
+                <a:srgbClr val="000066"/>
               </a:solidFill>
               <a:latin typeface="微軟正黑體" pitchFamily="34" charset="-120"/>
               <a:ea typeface="微軟正黑體" pitchFamily="34" charset="-120"/>
@@ -4014,58 +3368,24 @@
               <a:buNone/>
             </a:pPr>
             <a:r>
-              <a:rPr lang="zh-TW" altLang="en-US" sz="6400" b="1" dirty="0" smtClean="0">
-                <a:solidFill>
-                  <a:srgbClr val="660033"/>
+              <a:rPr lang="zh-TW" altLang="en-US" sz="6400" b="1" dirty="0">
+                <a:solidFill>
+                  <a:srgbClr val="000066"/>
                 </a:solidFill>
                 <a:latin typeface="微軟正黑體" pitchFamily="34" charset="-120"/>
                 <a:ea typeface="微軟正黑體" pitchFamily="34" charset="-120"/>
               </a:rPr>
-              <a:t>全知全能神，榮耀都歸你</a:t>
-            </a:r>
-            <a:endParaRPr lang="en-US" altLang="zh-TW" sz="6400" b="1" dirty="0" smtClean="0">
-              <a:solidFill>
-                <a:srgbClr val="660033"/>
-              </a:solidFill>
-              <a:latin typeface="微軟正黑體" pitchFamily="34" charset="-120"/>
-              <a:ea typeface="微軟正黑體" pitchFamily="34" charset="-120"/>
-            </a:endParaRPr>
-          </a:p>
-          <a:p>
-            <a:pPr algn="ctr">
-              <a:buNone/>
-            </a:pPr>
-            <a:r>
-              <a:rPr lang="zh-TW" altLang="en-US" sz="6400" b="1" dirty="0" smtClean="0">
-                <a:solidFill>
-                  <a:srgbClr val="660033"/>
-                </a:solidFill>
-                <a:latin typeface="微軟正黑體" pitchFamily="34" charset="-120"/>
-                <a:ea typeface="微軟正黑體" pitchFamily="34" charset="-120"/>
-              </a:rPr>
-              <a:t>在你沒有難成的事 </a:t>
-            </a:r>
-            <a:r>
-              <a:rPr lang="en-US" altLang="zh-TW" sz="4400" b="1" dirty="0" smtClean="0">
-                <a:solidFill>
-                  <a:srgbClr val="660033"/>
-                </a:solidFill>
-                <a:latin typeface="微軟正黑體" pitchFamily="34" charset="-120"/>
-                <a:ea typeface="微軟正黑體" pitchFamily="34" charset="-120"/>
-              </a:rPr>
-              <a:t>( x3 )</a:t>
-            </a:r>
-            <a:endParaRPr lang="en-US" altLang="zh-TW" sz="6400" b="1" dirty="0" smtClean="0">
-              <a:solidFill>
-                <a:srgbClr val="660033"/>
-              </a:solidFill>
-              <a:latin typeface="微軟正黑體" pitchFamily="34" charset="-120"/>
-              <a:ea typeface="微軟正黑體" pitchFamily="34" charset="-120"/>
-            </a:endParaRPr>
+              <a:t>我全人安然居住</a:t>
+            </a:r>
           </a:p>
         </p:txBody>
       </p:sp>
     </p:spTree>
+    <p:extLst>
+      <p:ext uri="{BB962C8B-B14F-4D97-AF65-F5344CB8AC3E}">
+        <p14:creationId xmlns:p14="http://schemas.microsoft.com/office/powerpoint/2010/main" val="235650098"/>
+      </p:ext>
+    </p:extLst>
   </p:cSld>
   <p:clrMapOvr>
     <a:masterClrMapping/>
@@ -4092,68 +3412,52 @@
       </p:grpSpPr>
       <p:sp>
         <p:nvSpPr>
-          <p:cNvPr id="2" name="標題 1"/>
-          <p:cNvSpPr>
-            <a:spLocks noGrp="1"/>
-          </p:cNvSpPr>
-          <p:nvPr>
-            <p:ph type="title"/>
-          </p:nvPr>
-        </p:nvSpPr>
-        <p:spPr/>
-        <p:txBody>
-          <a:bodyPr>
+          <p:cNvPr id="5" name="內容版面配置區 4"/>
+          <p:cNvSpPr>
+            <a:spLocks noGrp="1"/>
+          </p:cNvSpPr>
+          <p:nvPr>
+            <p:ph idx="1"/>
+          </p:nvPr>
+        </p:nvSpPr>
+        <p:spPr>
+          <a:xfrm>
+            <a:off x="0" y="2084853"/>
+            <a:ext cx="12192000" cy="2404863"/>
+          </a:xfrm>
+        </p:spPr>
+        <p:txBody>
+          <a:bodyPr anchor="ctr">
             <a:normAutofit/>
           </a:bodyPr>
           <a:lstStyle/>
           <a:p>
-            <a:r>
-              <a:rPr lang="zh-TW" altLang="en-US" sz="5400" b="1" dirty="0" smtClean="0">
-                <a:solidFill>
-                  <a:srgbClr val="660033"/>
-                </a:solidFill>
-                <a:latin typeface="微軟正黑體" pitchFamily="34" charset="-120"/>
-                <a:ea typeface="微軟正黑體" pitchFamily="34" charset="-120"/>
-                <a:cs typeface="+mn-cs"/>
-              </a:rPr>
-              <a:t>在祂沒有難成的事</a:t>
-            </a:r>
-          </a:p>
-        </p:txBody>
-      </p:sp>
-      <p:sp>
-        <p:nvSpPr>
-          <p:cNvPr id="3" name="內容版面配置區 2"/>
-          <p:cNvSpPr>
-            <a:spLocks noGrp="1"/>
-          </p:cNvSpPr>
-          <p:nvPr>
-            <p:ph idx="1"/>
-          </p:nvPr>
-        </p:nvSpPr>
-        <p:spPr/>
-        <p:txBody>
-          <a:bodyPr>
-            <a:noAutofit/>
-          </a:bodyPr>
-          <a:lstStyle/>
-          <a:p>
             <a:pPr algn="ctr">
               <a:buNone/>
             </a:pPr>
             <a:r>
-              <a:rPr lang="zh-TW" altLang="en-US" sz="6400" b="1" dirty="0" smtClean="0">
-                <a:solidFill>
-                  <a:srgbClr val="660033"/>
+              <a:rPr lang="zh-CN" altLang="en-US" sz="6400" b="1" dirty="0">
+                <a:solidFill>
+                  <a:srgbClr val="000066"/>
                 </a:solidFill>
                 <a:latin typeface="微軟正黑體" pitchFamily="34" charset="-120"/>
                 <a:ea typeface="微軟正黑體" pitchFamily="34" charset="-120"/>
               </a:rPr>
-              <a:t>沒有難成的事</a:t>
-            </a:r>
-            <a:endParaRPr lang="en-US" altLang="zh-TW" sz="6400" b="1" dirty="0" smtClean="0">
+              <a:t>祢</a:t>
+            </a:r>
+            <a:r>
+              <a:rPr lang="zh-TW" altLang="en-US" sz="6400" b="1" dirty="0">
+                <a:solidFill>
+                  <a:srgbClr val="000066"/>
+                </a:solidFill>
+                <a:latin typeface="微軟正黑體" pitchFamily="34" charset="-120"/>
+                <a:ea typeface="微軟正黑體" pitchFamily="34" charset="-120"/>
+              </a:rPr>
+              <a:t>是我至寶  我最深的喜悅</a:t>
+            </a:r>
+            <a:endParaRPr lang="en-US" altLang="zh-TW" sz="6400" b="1" dirty="0">
               <a:solidFill>
-                <a:srgbClr val="660033"/>
+                <a:srgbClr val="000066"/>
               </a:solidFill>
               <a:latin typeface="微軟正黑體" pitchFamily="34" charset="-120"/>
               <a:ea typeface="微軟正黑體" pitchFamily="34" charset="-120"/>
@@ -4164,41 +3468,31 @@
               <a:buNone/>
             </a:pPr>
             <a:r>
-              <a:rPr lang="zh-TW" altLang="en-US" sz="6400" b="1" dirty="0" smtClean="0">
-                <a:solidFill>
-                  <a:srgbClr val="660033"/>
+              <a:rPr lang="zh-TW" altLang="en-US" sz="6400" b="1" dirty="0">
+                <a:solidFill>
+                  <a:srgbClr val="000066"/>
                 </a:solidFill>
                 <a:latin typeface="微軟正黑體" pitchFamily="34" charset="-120"/>
                 <a:ea typeface="微軟正黑體" pitchFamily="34" charset="-120"/>
               </a:rPr>
-              <a:t>哈利路亞</a:t>
-            </a:r>
-            <a:endParaRPr lang="en-US" altLang="zh-TW" sz="6400" b="1" dirty="0" smtClean="0">
+              <a:t>全心仰望倚靠  我便不致動搖</a:t>
+            </a:r>
+            <a:endParaRPr lang="en-US" altLang="zh-TW" sz="6400" b="1" dirty="0">
               <a:solidFill>
-                <a:srgbClr val="660033"/>
+                <a:srgbClr val="000066"/>
               </a:solidFill>
               <a:latin typeface="微軟正黑體" pitchFamily="34" charset="-120"/>
               <a:ea typeface="微軟正黑體" pitchFamily="34" charset="-120"/>
             </a:endParaRPr>
           </a:p>
-          <a:p>
-            <a:pPr algn="ctr">
-              <a:buNone/>
-            </a:pPr>
-            <a:r>
-              <a:rPr lang="zh-TW" altLang="en-US" sz="6400" b="1" dirty="0" smtClean="0">
-                <a:solidFill>
-                  <a:srgbClr val="660033"/>
-                </a:solidFill>
-                <a:latin typeface="微軟正黑體" pitchFamily="34" charset="-120"/>
-                <a:ea typeface="微軟正黑體" pitchFamily="34" charset="-120"/>
-              </a:rPr>
-              <a:t>哈利路亞  哈利路亞</a:t>
-            </a:r>
-          </a:p>
         </p:txBody>
       </p:sp>
     </p:spTree>
+    <p:extLst>
+      <p:ext uri="{BB962C8B-B14F-4D97-AF65-F5344CB8AC3E}">
+        <p14:creationId xmlns:p14="http://schemas.microsoft.com/office/powerpoint/2010/main" val="2842043229"/>
+      </p:ext>
+    </p:extLst>
   </p:cSld>
   <p:clrMapOvr>
     <a:masterClrMapping/>
@@ -4225,81 +3519,118 @@
       </p:grpSpPr>
       <p:sp>
         <p:nvSpPr>
-          <p:cNvPr id="4" name="標題 3"/>
-          <p:cNvSpPr>
-            <a:spLocks noGrp="1"/>
-          </p:cNvSpPr>
-          <p:nvPr>
-            <p:ph type="title"/>
+          <p:cNvPr id="5" name="內容版面配置區 4"/>
+          <p:cNvSpPr>
+            <a:spLocks noGrp="1"/>
+          </p:cNvSpPr>
+          <p:nvPr>
+            <p:ph idx="1"/>
           </p:nvPr>
         </p:nvSpPr>
         <p:spPr>
           <a:xfrm>
-            <a:off x="0" y="2857513"/>
-            <a:ext cx="12192000" cy="1143000"/>
+            <a:off x="0" y="2084853"/>
+            <a:ext cx="12192000" cy="2404863"/>
           </a:xfrm>
         </p:spPr>
         <p:txBody>
-          <a:bodyPr>
-            <a:noAutofit/>
+          <a:bodyPr anchor="ctr">
+            <a:normAutofit/>
           </a:bodyPr>
           <a:lstStyle/>
           <a:p>
-            <a:r>
-              <a:rPr lang="zh-TW" altLang="en-US" sz="7200" b="1" i="1" dirty="0">
+            <a:pPr algn="ctr">
+              <a:buNone/>
+            </a:pPr>
+            <a:r>
+              <a:rPr lang="zh-CN" altLang="en-US" sz="6400" b="1" dirty="0">
                 <a:solidFill>
                   <a:srgbClr val="000066"/>
                 </a:solidFill>
-                <a:effectLst>
-                  <a:outerShdw blurRad="38100" dist="38100" dir="2700000" algn="tl">
-                    <a:srgbClr val="000000">
-                      <a:alpha val="43137"/>
-                    </a:srgbClr>
-                  </a:outerShdw>
-                </a:effectLst>
                 <a:latin typeface="微軟正黑體" pitchFamily="34" charset="-120"/>
                 <a:ea typeface="微軟正黑體" pitchFamily="34" charset="-120"/>
               </a:rPr>
-              <a:t>遇見</a:t>
-            </a:r>
-            <a:r>
-              <a:rPr lang="zh-CN" altLang="en-US" sz="7200" b="1" i="1" dirty="0">
+              <a:t>祢</a:t>
+            </a:r>
+            <a:r>
+              <a:rPr lang="zh-TW" altLang="en-US" sz="6400" b="1" dirty="0">
                 <a:solidFill>
                   <a:srgbClr val="000066"/>
                 </a:solidFill>
-                <a:effectLst>
-                  <a:outerShdw blurRad="38100" dist="38100" dir="2700000" algn="tl">
-                    <a:srgbClr val="000000">
-                      <a:alpha val="43137"/>
-                    </a:srgbClr>
-                  </a:outerShdw>
-                </a:effectLst>
                 <a:latin typeface="微軟正黑體" pitchFamily="34" charset="-120"/>
                 <a:ea typeface="微軟正黑體" pitchFamily="34" charset="-120"/>
               </a:rPr>
-              <a:t>袮</a:t>
-            </a:r>
-            <a:endParaRPr lang="zh-TW" altLang="en-US" sz="7200" b="1" i="1" dirty="0">
+              <a:t>與我同行  </a:t>
+            </a:r>
+            <a:r>
+              <a:rPr lang="zh-CN" altLang="en-US" sz="6400" b="1" dirty="0">
+                <a:solidFill>
+                  <a:srgbClr val="000066"/>
+                </a:solidFill>
+                <a:latin typeface="微軟正黑體" pitchFamily="34" charset="-120"/>
+                <a:ea typeface="微軟正黑體" pitchFamily="34" charset="-120"/>
+              </a:rPr>
+              <a:t>祢</a:t>
+            </a:r>
+            <a:r>
+              <a:rPr lang="zh-TW" altLang="en-US" sz="6400" b="1" dirty="0">
+                <a:solidFill>
+                  <a:srgbClr val="000066"/>
+                </a:solidFill>
+                <a:latin typeface="微軟正黑體" pitchFamily="34" charset="-120"/>
+                <a:ea typeface="微軟正黑體" pitchFamily="34" charset="-120"/>
+              </a:rPr>
+              <a:t>愛我到底</a:t>
+            </a:r>
+            <a:endParaRPr lang="en-US" altLang="zh-TW" sz="6400" b="1" dirty="0">
               <a:solidFill>
                 <a:srgbClr val="000066"/>
               </a:solidFill>
-              <a:effectLst>
-                <a:outerShdw blurRad="38100" dist="38100" dir="2700000" algn="tl">
-                  <a:srgbClr val="000000">
-                    <a:alpha val="43137"/>
-                  </a:srgbClr>
-                </a:outerShdw>
-              </a:effectLst>
               <a:latin typeface="微軟正黑體" pitchFamily="34" charset="-120"/>
               <a:ea typeface="微軟正黑體" pitchFamily="34" charset="-120"/>
             </a:endParaRPr>
           </a:p>
+          <a:p>
+            <a:pPr algn="ctr">
+              <a:buNone/>
+            </a:pPr>
+            <a:r>
+              <a:rPr lang="zh-TW" altLang="en-US" sz="6400" b="1" dirty="0">
+                <a:solidFill>
+                  <a:srgbClr val="000066"/>
+                </a:solidFill>
+                <a:latin typeface="微軟正黑體" pitchFamily="34" charset="-120"/>
+                <a:ea typeface="微軟正黑體" pitchFamily="34" charset="-120"/>
+              </a:rPr>
+              <a:t>這一生有</a:t>
+            </a:r>
+            <a:r>
+              <a:rPr lang="zh-CN" altLang="en-US" sz="6400" b="1" dirty="0">
+                <a:solidFill>
+                  <a:srgbClr val="000066"/>
+                </a:solidFill>
+                <a:latin typeface="微軟正黑體" pitchFamily="34" charset="-120"/>
+                <a:ea typeface="微軟正黑體" pitchFamily="34" charset="-120"/>
+              </a:rPr>
+              <a:t>祢</a:t>
+            </a:r>
+            <a:r>
+              <a:rPr lang="zh-TW" altLang="en-US" sz="6400" b="1" dirty="0">
+                <a:solidFill>
+                  <a:srgbClr val="000066"/>
+                </a:solidFill>
+                <a:latin typeface="微軟正黑體" pitchFamily="34" charset="-120"/>
+                <a:ea typeface="微軟正黑體" pitchFamily="34" charset="-120"/>
+              </a:rPr>
+              <a:t>真好</a:t>
+            </a:r>
+          </a:p>
         </p:txBody>
       </p:sp>
     </p:spTree>
     <p:extLst>
       <p:ext uri="{BB962C8B-B14F-4D97-AF65-F5344CB8AC3E}">
-        <p14:creationId xmlns:p14="http://schemas.microsoft.com/office/powerpoint/2010/main" xmlns="" val="2799653032"/>
+        <p14:creationId xmlns:p14="http://schemas.microsoft.com/office/powerpoint/2010/main" val="2529367873"/>
       </p:ext>
     </p:extLst>
   </p:cSld>
@@ -4359,7 +3690,7 @@
                 <a:latin typeface="微軟正黑體" pitchFamily="34" charset="-120"/>
                 <a:ea typeface="微軟正黑體" pitchFamily="34" charset="-120"/>
               </a:rPr>
-              <a:t>當我遇見</a:t>
+              <a:t>在</a:t>
             </a:r>
             <a:r>
               <a:rPr lang="zh-CN" altLang="en-US" sz="6400" b="1" dirty="0">
@@ -4369,27 +3700,17 @@
                 <a:latin typeface="微軟正黑體" pitchFamily="34" charset="-120"/>
                 <a:ea typeface="微軟正黑體" pitchFamily="34" charset="-120"/>
               </a:rPr>
-              <a:t>袮</a:t>
-            </a:r>
-            <a:r>
-              <a:rPr lang="en-US" altLang="zh-TW" sz="6400" b="1" dirty="0">
+              <a:t>祢</a:t>
+            </a:r>
+            <a:r>
+              <a:rPr lang="zh-TW" altLang="en-US" sz="6400" b="1" dirty="0">
                 <a:solidFill>
                   <a:srgbClr val="000066"/>
                 </a:solidFill>
                 <a:latin typeface="微軟正黑體" pitchFamily="34" charset="-120"/>
                 <a:ea typeface="微軟正黑體" pitchFamily="34" charset="-120"/>
               </a:rPr>
-              <a:t>  </a:t>
-            </a:r>
-            <a:r>
-              <a:rPr lang="zh-TW" altLang="en-US" sz="6400" b="1" dirty="0">
-                <a:solidFill>
-                  <a:srgbClr val="000066"/>
-                </a:solidFill>
-                <a:latin typeface="微軟正黑體" pitchFamily="34" charset="-120"/>
-                <a:ea typeface="微軟正黑體" pitchFamily="34" charset="-120"/>
-              </a:rPr>
-              <a:t>使我夜間歌唱</a:t>
+              <a:t>面前有滿足的喜樂</a:t>
             </a:r>
             <a:endParaRPr lang="en-US" altLang="zh-TW" sz="6400" b="1" dirty="0">
               <a:solidFill>
@@ -4411,7 +3732,7 @@
                 <a:latin typeface="微軟正黑體" pitchFamily="34" charset="-120"/>
                 <a:ea typeface="微軟正黑體" pitchFamily="34" charset="-120"/>
               </a:rPr>
-              <a:t>超越一切環境  看見</a:t>
+              <a:t>在</a:t>
             </a:r>
             <a:r>
               <a:rPr lang="zh-CN" altLang="en-US" sz="6400" b="1" dirty="0">
@@ -4421,7 +3742,7 @@
                 <a:latin typeface="微軟正黑體" pitchFamily="34" charset="-120"/>
                 <a:ea typeface="微軟正黑體" pitchFamily="34" charset="-120"/>
               </a:rPr>
-              <a:t>袮</a:t>
+              <a:t>祢</a:t>
             </a:r>
             <a:r>
               <a:rPr lang="zh-TW" altLang="en-US" sz="6400" b="1" dirty="0">
@@ -4431,7 +3752,7 @@
                 <a:latin typeface="微軟正黑體" pitchFamily="34" charset="-120"/>
                 <a:ea typeface="微軟正黑體" pitchFamily="34" charset="-120"/>
               </a:rPr>
-              <a:t>的同在</a:t>
+              <a:t>右手中有永遠的福樂</a:t>
             </a:r>
             <a:endParaRPr lang="en-US" altLang="zh-TW" sz="6400" b="1" dirty="0">
               <a:solidFill>
@@ -4446,7 +3767,7 @@
     </p:spTree>
     <p:extLst>
       <p:ext uri="{BB962C8B-B14F-4D97-AF65-F5344CB8AC3E}">
-        <p14:creationId xmlns:p14="http://schemas.microsoft.com/office/powerpoint/2010/main" xmlns="" val="1037318506"/>
+        <p14:creationId xmlns:p14="http://schemas.microsoft.com/office/powerpoint/2010/main" val="1026985615"/>
       </p:ext>
     </p:extLst>
   </p:cSld>
@@ -4506,7 +3827,7 @@
                 <a:latin typeface="微軟正黑體" pitchFamily="34" charset="-120"/>
                 <a:ea typeface="微軟正黑體" pitchFamily="34" charset="-120"/>
               </a:rPr>
-              <a:t>我的心歡喜  我的靈快樂</a:t>
+              <a:t>量給我的地界  坐落佳美之處 </a:t>
             </a:r>
             <a:endParaRPr lang="en-US" altLang="zh-TW" sz="6400" b="1" dirty="0">
               <a:solidFill>
@@ -4528,7 +3849,7 @@
                 <a:latin typeface="微軟正黑體" pitchFamily="34" charset="-120"/>
                 <a:ea typeface="微軟正黑體" pitchFamily="34" charset="-120"/>
               </a:rPr>
-              <a:t>我全人安然居住</a:t>
+              <a:t>我的產業實在美好</a:t>
             </a:r>
           </a:p>
         </p:txBody>
@@ -4536,7 +3857,7 @@
     </p:spTree>
     <p:extLst>
       <p:ext uri="{BB962C8B-B14F-4D97-AF65-F5344CB8AC3E}">
-        <p14:creationId xmlns:p14="http://schemas.microsoft.com/office/powerpoint/2010/main" xmlns="" val="235650098"/>
+        <p14:creationId xmlns:p14="http://schemas.microsoft.com/office/powerpoint/2010/main" val="2785632229"/>
       </p:ext>
     </p:extLst>
   </p:cSld>
@@ -4589,24 +3910,34 @@
               <a:buNone/>
             </a:pPr>
             <a:r>
-              <a:rPr lang="zh-CN" altLang="en-US" sz="6400" b="1" dirty="0">
+              <a:rPr lang="zh-TW" altLang="en-US" sz="6400" b="1" dirty="0">
                 <a:solidFill>
                   <a:srgbClr val="000066"/>
                 </a:solidFill>
                 <a:latin typeface="微軟正黑體" pitchFamily="34" charset="-120"/>
                 <a:ea typeface="微軟正黑體" pitchFamily="34" charset="-120"/>
               </a:rPr>
-              <a:t>袮</a:t>
-            </a:r>
-            <a:r>
-              <a:rPr lang="zh-TW" altLang="en-US" sz="6400" b="1" dirty="0">
+              <a:t>在</a:t>
+            </a:r>
+            <a:r>
+              <a:rPr lang="zh-CN" altLang="en-US" sz="6400" b="1" dirty="0">
                 <a:solidFill>
                   <a:srgbClr val="000066"/>
                 </a:solidFill>
                 <a:latin typeface="微軟正黑體" pitchFamily="34" charset="-120"/>
                 <a:ea typeface="微軟正黑體" pitchFamily="34" charset="-120"/>
               </a:rPr>
-              <a:t>是我至寶  我最深的喜悅</a:t>
+              <a:t>祢</a:t>
+            </a:r>
+            <a:r>
+              <a:rPr lang="zh-TW" altLang="en-US" sz="6400" b="1" dirty="0">
+                <a:solidFill>
+                  <a:srgbClr val="000066"/>
+                </a:solidFill>
+                <a:latin typeface="微軟正黑體" pitchFamily="34" charset="-120"/>
+                <a:ea typeface="微軟正黑體" pitchFamily="34" charset="-120"/>
+              </a:rPr>
+              <a:t>面前有滿足的喜樂</a:t>
             </a:r>
             <a:endParaRPr lang="en-US" altLang="zh-TW" sz="6400" b="1" dirty="0">
               <a:solidFill>
@@ -4628,7 +3959,27 @@
                 <a:latin typeface="微軟正黑體" pitchFamily="34" charset="-120"/>
                 <a:ea typeface="微軟正黑體" pitchFamily="34" charset="-120"/>
               </a:rPr>
-              <a:t>全心仰望倚靠  我便不致動搖</a:t>
+              <a:t>在</a:t>
+            </a:r>
+            <a:r>
+              <a:rPr lang="zh-CN" altLang="en-US" sz="6400" b="1" dirty="0">
+                <a:solidFill>
+                  <a:srgbClr val="000066"/>
+                </a:solidFill>
+                <a:latin typeface="微軟正黑體" pitchFamily="34" charset="-120"/>
+                <a:ea typeface="微軟正黑體" pitchFamily="34" charset="-120"/>
+              </a:rPr>
+              <a:t>祢</a:t>
+            </a:r>
+            <a:r>
+              <a:rPr lang="zh-TW" altLang="en-US" sz="6400" b="1" dirty="0">
+                <a:solidFill>
+                  <a:srgbClr val="000066"/>
+                </a:solidFill>
+                <a:latin typeface="微軟正黑體" pitchFamily="34" charset="-120"/>
+                <a:ea typeface="微軟正黑體" pitchFamily="34" charset="-120"/>
+              </a:rPr>
+              <a:t>右手中有永遠的福樂</a:t>
             </a:r>
             <a:endParaRPr lang="en-US" altLang="zh-TW" sz="6400" b="1" dirty="0">
               <a:solidFill>
@@ -4643,7 +3994,7 @@
     </p:spTree>
     <p:extLst>
       <p:ext uri="{BB962C8B-B14F-4D97-AF65-F5344CB8AC3E}">
-        <p14:creationId xmlns:p14="http://schemas.microsoft.com/office/powerpoint/2010/main" xmlns="" val="2842043229"/>
+        <p14:creationId xmlns:p14="http://schemas.microsoft.com/office/powerpoint/2010/main" val="1469619297"/>
       </p:ext>
     </p:extLst>
   </p:cSld>
@@ -4703,7 +4054,7 @@
                 <a:latin typeface="微軟正黑體" pitchFamily="34" charset="-120"/>
                 <a:ea typeface="微軟正黑體" pitchFamily="34" charset="-120"/>
               </a:rPr>
-              <a:t>袮</a:t>
+              <a:t>祢</a:t>
             </a:r>
             <a:r>
               <a:rPr lang="zh-TW" altLang="en-US" sz="6400" b="1" dirty="0">
@@ -4713,7 +4064,7 @@
                 <a:latin typeface="微軟正黑體" pitchFamily="34" charset="-120"/>
                 <a:ea typeface="微軟正黑體" pitchFamily="34" charset="-120"/>
               </a:rPr>
-              <a:t>與我同行  </a:t>
+              <a:t>是我的主  好處不在</a:t>
             </a:r>
             <a:r>
               <a:rPr lang="zh-CN" altLang="en-US" sz="6400" b="1" dirty="0">
@@ -4723,7 +4074,7 @@
                 <a:latin typeface="微軟正黑體" pitchFamily="34" charset="-120"/>
                 <a:ea typeface="微軟正黑體" pitchFamily="34" charset="-120"/>
               </a:rPr>
-              <a:t>袮</a:t>
+              <a:t>祢</a:t>
             </a:r>
             <a:r>
               <a:rPr lang="zh-TW" altLang="en-US" sz="6400" b="1" dirty="0">
@@ -4733,7 +4084,7 @@
                 <a:latin typeface="微軟正黑體" pitchFamily="34" charset="-120"/>
                 <a:ea typeface="微軟正黑體" pitchFamily="34" charset="-120"/>
               </a:rPr>
-              <a:t>愛我到底</a:t>
+              <a:t>以外 </a:t>
             </a:r>
             <a:endParaRPr lang="en-US" altLang="zh-TW" sz="6400" b="1" dirty="0">
               <a:solidFill>
@@ -4755,7 +4106,7 @@
                 <a:latin typeface="微軟正黑體" pitchFamily="34" charset="-120"/>
                 <a:ea typeface="微軟正黑體" pitchFamily="34" charset="-120"/>
               </a:rPr>
-              <a:t>這一生有</a:t>
+              <a:t>遇見</a:t>
             </a:r>
             <a:r>
               <a:rPr lang="zh-CN" altLang="en-US" sz="6400" b="1" dirty="0">
@@ -4765,7 +4116,7 @@
                 <a:latin typeface="微軟正黑體" pitchFamily="34" charset="-120"/>
                 <a:ea typeface="微軟正黑體" pitchFamily="34" charset="-120"/>
               </a:rPr>
-              <a:t>袮</a:t>
+              <a:t>祢  </a:t>
             </a:r>
             <a:r>
               <a:rPr lang="zh-TW" altLang="en-US" sz="6400" b="1" dirty="0">
@@ -4775,7 +4126,7 @@
                 <a:latin typeface="微軟正黑體" pitchFamily="34" charset="-120"/>
                 <a:ea typeface="微軟正黑體" pitchFamily="34" charset="-120"/>
               </a:rPr>
-              <a:t>真好</a:t>
+              <a:t>我就遇見幸福</a:t>
             </a:r>
           </a:p>
         </p:txBody>
@@ -4783,7 +4134,7 @@
     </p:spTree>
     <p:extLst>
       <p:ext uri="{BB962C8B-B14F-4D97-AF65-F5344CB8AC3E}">
-        <p14:creationId xmlns:p14="http://schemas.microsoft.com/office/powerpoint/2010/main" xmlns="" val="2529367873"/>
+        <p14:creationId xmlns:p14="http://schemas.microsoft.com/office/powerpoint/2010/main" val="377867710"/>
       </p:ext>
     </p:extLst>
   </p:cSld>
